--- a/CSE7302-Internship_Review-1 Deloitte.pptx
+++ b/CSE7302-Internship_Review-1 Deloitte.pptx
@@ -119,7 +119,7 @@
   </p:defaultTextStyle>
   <p:extLst>
     <p:ext uri="{EFAFB233-063F-42B5-8137-9DF3F51BA10A}">
-      <p15:sldGuideLst xmlns:p15="http://schemas.microsoft.com/office/powerpoint/2012/main" xmlns=""/>
+      <p15:sldGuideLst xmlns="" xmlns:p15="http://schemas.microsoft.com/office/powerpoint/2012/main"/>
     </p:ext>
   </p:extLst>
 </p:presentation>
@@ -1841,7 +1841,7 @@
   <dgm:whole/>
   <dgm:extLst>
     <a:ext uri="http://schemas.microsoft.com/office/drawing/2008/diagram">
-      <dsp:dataModelExt xmlns:dsp="http://schemas.microsoft.com/office/drawing/2008/diagram" xmlns="" relId="rId6" minVer="http://schemas.openxmlformats.org/drawingml/2006/diagram"/>
+      <dsp:dataModelExt xmlns="" xmlns:dsp="http://schemas.microsoft.com/office/drawing/2008/diagram" relId="rId6" minVer="http://schemas.openxmlformats.org/drawingml/2006/diagram"/>
     </a:ext>
   </dgm:extLst>
 </dgm:dataModel>
@@ -5585,7 +5585,7 @@
             <a:fld id="{448B91F7-0A31-4809-8E31-54F32ACD1E72}" type="datetimeFigureOut">
               <a:rPr lang="en-GB" smtClean="0"/>
               <a:pPr/>
-              <a:t>15/01/2026</a:t>
+              <a:t>22/04/2026</a:t>
             </a:fld>
             <a:endParaRPr lang="en-GB" dirty="0"/>
           </a:p>
@@ -5754,7 +5754,7 @@
     </p:spTree>
     <p:extLst>
       <p:ext uri="{BB962C8B-B14F-4D97-AF65-F5344CB8AC3E}">
-        <p14:creationId xmlns:p14="http://schemas.microsoft.com/office/powerpoint/2010/main" xmlns="" val="3076450711"/>
+        <p14:creationId xmlns="" xmlns:p14="http://schemas.microsoft.com/office/powerpoint/2010/main" val="3076450711"/>
       </p:ext>
     </p:extLst>
   </p:cSld>
@@ -5953,7 +5953,7 @@
     </p:spTree>
     <p:extLst>
       <p:ext uri="{BB962C8B-B14F-4D97-AF65-F5344CB8AC3E}">
-        <p14:creationId xmlns:p14="http://schemas.microsoft.com/office/powerpoint/2010/main" xmlns="" val="981556531"/>
+        <p14:creationId xmlns="" xmlns:p14="http://schemas.microsoft.com/office/powerpoint/2010/main" val="981556531"/>
       </p:ext>
     </p:extLst>
   </p:cSld>
@@ -6062,7 +6062,7 @@
     </p:spTree>
     <p:extLst>
       <p:ext uri="{BB962C8B-B14F-4D97-AF65-F5344CB8AC3E}">
-        <p14:creationId xmlns:p14="http://schemas.microsoft.com/office/powerpoint/2010/main" xmlns="" val="993583584"/>
+        <p14:creationId xmlns="" xmlns:p14="http://schemas.microsoft.com/office/powerpoint/2010/main" val="993583584"/>
       </p:ext>
     </p:extLst>
   </p:cSld>
@@ -6108,7 +6108,7 @@
           <p:cNvPr id="2" name="Title 1">
             <a:extLst>
               <a:ext uri="{FF2B5EF4-FFF2-40B4-BE49-F238E27FC236}">
-                <a16:creationId xmlns:a16="http://schemas.microsoft.com/office/drawing/2014/main" xmlns="" id="{55FEB448-544F-1163-CF6D-D801EF6DABD0}"/>
+                <a16:creationId xmlns="" xmlns:a16="http://schemas.microsoft.com/office/drawing/2014/main" id="{55FEB448-544F-1163-CF6D-D801EF6DABD0}"/>
               </a:ext>
             </a:extLst>
           </p:cNvPr>
@@ -6146,7 +6146,7 @@
           <p:cNvPr id="3" name="Subtitle 2">
             <a:extLst>
               <a:ext uri="{FF2B5EF4-FFF2-40B4-BE49-F238E27FC236}">
-                <a16:creationId xmlns:a16="http://schemas.microsoft.com/office/drawing/2014/main" xmlns="" id="{52240B45-37FF-28D2-69C1-D8842A0F2E61}"/>
+                <a16:creationId xmlns="" xmlns:a16="http://schemas.microsoft.com/office/drawing/2014/main" id="{52240B45-37FF-28D2-69C1-D8842A0F2E61}"/>
               </a:ext>
             </a:extLst>
           </p:cNvPr>
@@ -6217,7 +6217,7 @@
           <p:cNvPr id="4" name="Date Placeholder 3">
             <a:extLst>
               <a:ext uri="{FF2B5EF4-FFF2-40B4-BE49-F238E27FC236}">
-                <a16:creationId xmlns:a16="http://schemas.microsoft.com/office/drawing/2014/main" xmlns="" id="{AA61B0F3-96B9-62B2-E1C5-4D3D4823B899}"/>
+                <a16:creationId xmlns="" xmlns:a16="http://schemas.microsoft.com/office/drawing/2014/main" id="{AA61B0F3-96B9-62B2-E1C5-4D3D4823B899}"/>
               </a:ext>
             </a:extLst>
           </p:cNvPr>
@@ -6236,7 +6236,7 @@
             <a:fld id="{1F66083A-C1B7-4B46-82C5-289BB6E6D5A4}" type="datetime1">
               <a:rPr lang="en-IN" smtClean="0"/>
               <a:pPr/>
-              <a:t>15-01-2026</a:t>
+              <a:t>22-04-2026</a:t>
             </a:fld>
             <a:endParaRPr lang="en-IN" dirty="0"/>
           </a:p>
@@ -6247,7 +6247,7 @@
           <p:cNvPr id="5" name="Footer Placeholder 4">
             <a:extLst>
               <a:ext uri="{FF2B5EF4-FFF2-40B4-BE49-F238E27FC236}">
-                <a16:creationId xmlns:a16="http://schemas.microsoft.com/office/drawing/2014/main" xmlns="" id="{15DB3F67-E836-5AA2-B32D-A0C3A9333090}"/>
+                <a16:creationId xmlns="" xmlns:a16="http://schemas.microsoft.com/office/drawing/2014/main" id="{15DB3F67-E836-5AA2-B32D-A0C3A9333090}"/>
               </a:ext>
             </a:extLst>
           </p:cNvPr>
@@ -6272,7 +6272,7 @@
           <p:cNvPr id="6" name="Slide Number Placeholder 5">
             <a:extLst>
               <a:ext uri="{FF2B5EF4-FFF2-40B4-BE49-F238E27FC236}">
-                <a16:creationId xmlns:a16="http://schemas.microsoft.com/office/drawing/2014/main" xmlns="" id="{A11EEA5E-DC19-ABCD-6267-C545BA777197}"/>
+                <a16:creationId xmlns="" xmlns:a16="http://schemas.microsoft.com/office/drawing/2014/main" id="{A11EEA5E-DC19-ABCD-6267-C545BA777197}"/>
               </a:ext>
             </a:extLst>
           </p:cNvPr>
@@ -6300,7 +6300,7 @@
     </p:spTree>
     <p:extLst>
       <p:ext uri="{BB962C8B-B14F-4D97-AF65-F5344CB8AC3E}">
-        <p14:creationId xmlns:p14="http://schemas.microsoft.com/office/powerpoint/2010/main" xmlns="" val="1869472976"/>
+        <p14:creationId xmlns="" xmlns:p14="http://schemas.microsoft.com/office/powerpoint/2010/main" val="1869472976"/>
       </p:ext>
     </p:extLst>
   </p:cSld>
@@ -6332,7 +6332,7 @@
           <p:cNvPr id="2" name="Title 1">
             <a:extLst>
               <a:ext uri="{FF2B5EF4-FFF2-40B4-BE49-F238E27FC236}">
-                <a16:creationId xmlns:a16="http://schemas.microsoft.com/office/drawing/2014/main" xmlns="" id="{289011F1-D172-AE20-8D21-0A938E210EF6}"/>
+                <a16:creationId xmlns="" xmlns:a16="http://schemas.microsoft.com/office/drawing/2014/main" id="{289011F1-D172-AE20-8D21-0A938E210EF6}"/>
               </a:ext>
             </a:extLst>
           </p:cNvPr>
@@ -6361,7 +6361,7 @@
           <p:cNvPr id="3" name="Vertical Text Placeholder 2">
             <a:extLst>
               <a:ext uri="{FF2B5EF4-FFF2-40B4-BE49-F238E27FC236}">
-                <a16:creationId xmlns:a16="http://schemas.microsoft.com/office/drawing/2014/main" xmlns="" id="{EE8E52B7-EB5E-AF2A-3525-5B4BBFD15AAF}"/>
+                <a16:creationId xmlns="" xmlns:a16="http://schemas.microsoft.com/office/drawing/2014/main" id="{EE8E52B7-EB5E-AF2A-3525-5B4BBFD15AAF}"/>
               </a:ext>
             </a:extLst>
           </p:cNvPr>
@@ -6419,7 +6419,7 @@
           <p:cNvPr id="4" name="Date Placeholder 3">
             <a:extLst>
               <a:ext uri="{FF2B5EF4-FFF2-40B4-BE49-F238E27FC236}">
-                <a16:creationId xmlns:a16="http://schemas.microsoft.com/office/drawing/2014/main" xmlns="" id="{316D7DCF-1783-47F8-CDB8-8B7167ECD0D8}"/>
+                <a16:creationId xmlns="" xmlns:a16="http://schemas.microsoft.com/office/drawing/2014/main" id="{316D7DCF-1783-47F8-CDB8-8B7167ECD0D8}"/>
               </a:ext>
             </a:extLst>
           </p:cNvPr>
@@ -6438,7 +6438,7 @@
             <a:fld id="{3FC26915-BE00-456E-A9CA-DB9FE1FD674A}" type="datetime1">
               <a:rPr lang="en-IN" smtClean="0"/>
               <a:pPr/>
-              <a:t>15-01-2026</a:t>
+              <a:t>22-04-2026</a:t>
             </a:fld>
             <a:endParaRPr lang="en-IN" dirty="0"/>
           </a:p>
@@ -6449,7 +6449,7 @@
           <p:cNvPr id="5" name="Footer Placeholder 4">
             <a:extLst>
               <a:ext uri="{FF2B5EF4-FFF2-40B4-BE49-F238E27FC236}">
-                <a16:creationId xmlns:a16="http://schemas.microsoft.com/office/drawing/2014/main" xmlns="" id="{F46968A7-C083-F20B-0369-2067E75DE54C}"/>
+                <a16:creationId xmlns="" xmlns:a16="http://schemas.microsoft.com/office/drawing/2014/main" id="{F46968A7-C083-F20B-0369-2067E75DE54C}"/>
               </a:ext>
             </a:extLst>
           </p:cNvPr>
@@ -6474,7 +6474,7 @@
           <p:cNvPr id="6" name="Slide Number Placeholder 5">
             <a:extLst>
               <a:ext uri="{FF2B5EF4-FFF2-40B4-BE49-F238E27FC236}">
-                <a16:creationId xmlns:a16="http://schemas.microsoft.com/office/drawing/2014/main" xmlns="" id="{7255429C-96E8-1064-0F87-6D95D15F9384}"/>
+                <a16:creationId xmlns="" xmlns:a16="http://schemas.microsoft.com/office/drawing/2014/main" id="{7255429C-96E8-1064-0F87-6D95D15F9384}"/>
               </a:ext>
             </a:extLst>
           </p:cNvPr>
@@ -6502,7 +6502,7 @@
     </p:spTree>
     <p:extLst>
       <p:ext uri="{BB962C8B-B14F-4D97-AF65-F5344CB8AC3E}">
-        <p14:creationId xmlns:p14="http://schemas.microsoft.com/office/powerpoint/2010/main" xmlns="" val="2448761823"/>
+        <p14:creationId xmlns="" xmlns:p14="http://schemas.microsoft.com/office/powerpoint/2010/main" val="2448761823"/>
       </p:ext>
     </p:extLst>
   </p:cSld>
@@ -6534,7 +6534,7 @@
           <p:cNvPr id="2" name="Vertical Title 1">
             <a:extLst>
               <a:ext uri="{FF2B5EF4-FFF2-40B4-BE49-F238E27FC236}">
-                <a16:creationId xmlns:a16="http://schemas.microsoft.com/office/drawing/2014/main" xmlns="" id="{86A47F57-697A-B97E-DD3A-2910D126C5B4}"/>
+                <a16:creationId xmlns="" xmlns:a16="http://schemas.microsoft.com/office/drawing/2014/main" id="{86A47F57-697A-B97E-DD3A-2910D126C5B4}"/>
               </a:ext>
             </a:extLst>
           </p:cNvPr>
@@ -6568,7 +6568,7 @@
           <p:cNvPr id="3" name="Vertical Text Placeholder 2">
             <a:extLst>
               <a:ext uri="{FF2B5EF4-FFF2-40B4-BE49-F238E27FC236}">
-                <a16:creationId xmlns:a16="http://schemas.microsoft.com/office/drawing/2014/main" xmlns="" id="{673F252A-D3F9-0BB4-D962-668169761B8C}"/>
+                <a16:creationId xmlns="" xmlns:a16="http://schemas.microsoft.com/office/drawing/2014/main" id="{673F252A-D3F9-0BB4-D962-668169761B8C}"/>
               </a:ext>
             </a:extLst>
           </p:cNvPr>
@@ -6631,7 +6631,7 @@
           <p:cNvPr id="4" name="Date Placeholder 3">
             <a:extLst>
               <a:ext uri="{FF2B5EF4-FFF2-40B4-BE49-F238E27FC236}">
-                <a16:creationId xmlns:a16="http://schemas.microsoft.com/office/drawing/2014/main" xmlns="" id="{B1B93D65-8824-8EBE-4CB8-E4D7750FE881}"/>
+                <a16:creationId xmlns="" xmlns:a16="http://schemas.microsoft.com/office/drawing/2014/main" id="{B1B93D65-8824-8EBE-4CB8-E4D7750FE881}"/>
               </a:ext>
             </a:extLst>
           </p:cNvPr>
@@ -6650,7 +6650,7 @@
             <a:fld id="{FAA2D233-408A-4415-B919-B7ECAA5043E2}" type="datetime1">
               <a:rPr lang="en-IN" smtClean="0"/>
               <a:pPr/>
-              <a:t>15-01-2026</a:t>
+              <a:t>22-04-2026</a:t>
             </a:fld>
             <a:endParaRPr lang="en-IN" dirty="0"/>
           </a:p>
@@ -6661,7 +6661,7 @@
           <p:cNvPr id="5" name="Footer Placeholder 4">
             <a:extLst>
               <a:ext uri="{FF2B5EF4-FFF2-40B4-BE49-F238E27FC236}">
-                <a16:creationId xmlns:a16="http://schemas.microsoft.com/office/drawing/2014/main" xmlns="" id="{2A1EA1BA-06A5-9F5B-136C-80EDFD72EB63}"/>
+                <a16:creationId xmlns="" xmlns:a16="http://schemas.microsoft.com/office/drawing/2014/main" id="{2A1EA1BA-06A5-9F5B-136C-80EDFD72EB63}"/>
               </a:ext>
             </a:extLst>
           </p:cNvPr>
@@ -6686,7 +6686,7 @@
           <p:cNvPr id="6" name="Slide Number Placeholder 5">
             <a:extLst>
               <a:ext uri="{FF2B5EF4-FFF2-40B4-BE49-F238E27FC236}">
-                <a16:creationId xmlns:a16="http://schemas.microsoft.com/office/drawing/2014/main" xmlns="" id="{B163C8CA-61F8-0704-0F6E-DDDD2B9987DD}"/>
+                <a16:creationId xmlns="" xmlns:a16="http://schemas.microsoft.com/office/drawing/2014/main" id="{B163C8CA-61F8-0704-0F6E-DDDD2B9987DD}"/>
               </a:ext>
             </a:extLst>
           </p:cNvPr>
@@ -6714,7 +6714,7 @@
     </p:spTree>
     <p:extLst>
       <p:ext uri="{BB962C8B-B14F-4D97-AF65-F5344CB8AC3E}">
-        <p14:creationId xmlns:p14="http://schemas.microsoft.com/office/powerpoint/2010/main" xmlns="" val="2748782496"/>
+        <p14:creationId xmlns="" xmlns:p14="http://schemas.microsoft.com/office/powerpoint/2010/main" val="2748782496"/>
       </p:ext>
     </p:extLst>
   </p:cSld>
@@ -6746,7 +6746,7 @@
           <p:cNvPr id="2" name="Title 1">
             <a:extLst>
               <a:ext uri="{FF2B5EF4-FFF2-40B4-BE49-F238E27FC236}">
-                <a16:creationId xmlns:a16="http://schemas.microsoft.com/office/drawing/2014/main" xmlns="" id="{91050CDE-F21A-AC1C-7DD9-906370B0FA03}"/>
+                <a16:creationId xmlns="" xmlns:a16="http://schemas.microsoft.com/office/drawing/2014/main" id="{91050CDE-F21A-AC1C-7DD9-906370B0FA03}"/>
               </a:ext>
             </a:extLst>
           </p:cNvPr>
@@ -6775,7 +6775,7 @@
           <p:cNvPr id="3" name="Content Placeholder 2">
             <a:extLst>
               <a:ext uri="{FF2B5EF4-FFF2-40B4-BE49-F238E27FC236}">
-                <a16:creationId xmlns:a16="http://schemas.microsoft.com/office/drawing/2014/main" xmlns="" id="{A4139EE0-A89B-B238-94A4-DB32BBD14E29}"/>
+                <a16:creationId xmlns="" xmlns:a16="http://schemas.microsoft.com/office/drawing/2014/main" id="{A4139EE0-A89B-B238-94A4-DB32BBD14E29}"/>
               </a:ext>
             </a:extLst>
           </p:cNvPr>
@@ -6833,7 +6833,7 @@
           <p:cNvPr id="4" name="Date Placeholder 3">
             <a:extLst>
               <a:ext uri="{FF2B5EF4-FFF2-40B4-BE49-F238E27FC236}">
-                <a16:creationId xmlns:a16="http://schemas.microsoft.com/office/drawing/2014/main" xmlns="" id="{B6BAB674-71DE-8BA7-9D0E-C99F6B3C0FBD}"/>
+                <a16:creationId xmlns="" xmlns:a16="http://schemas.microsoft.com/office/drawing/2014/main" id="{B6BAB674-71DE-8BA7-9D0E-C99F6B3C0FBD}"/>
               </a:ext>
             </a:extLst>
           </p:cNvPr>
@@ -6866,7 +6866,7 @@
             <a:fld id="{864BFFB7-4443-4602-A990-B076C1CFE86C}" type="datetime1">
               <a:rPr lang="en-IN" smtClean="0"/>
               <a:pPr/>
-              <a:t>15-01-2026</a:t>
+              <a:t>22-04-2026</a:t>
             </a:fld>
             <a:endParaRPr lang="en-IN" dirty="0"/>
           </a:p>
@@ -6877,7 +6877,7 @@
           <p:cNvPr id="5" name="Footer Placeholder 4">
             <a:extLst>
               <a:ext uri="{FF2B5EF4-FFF2-40B4-BE49-F238E27FC236}">
-                <a16:creationId xmlns:a16="http://schemas.microsoft.com/office/drawing/2014/main" xmlns="" id="{8B72554B-0ACB-E334-5BBE-7A83BFE374FE}"/>
+                <a16:creationId xmlns="" xmlns:a16="http://schemas.microsoft.com/office/drawing/2014/main" id="{8B72554B-0ACB-E334-5BBE-7A83BFE374FE}"/>
               </a:ext>
             </a:extLst>
           </p:cNvPr>
@@ -6902,7 +6902,7 @@
           <p:cNvPr id="6" name="Slide Number Placeholder 5">
             <a:extLst>
               <a:ext uri="{FF2B5EF4-FFF2-40B4-BE49-F238E27FC236}">
-                <a16:creationId xmlns:a16="http://schemas.microsoft.com/office/drawing/2014/main" xmlns="" id="{D3F062A5-E36B-5C05-6C36-F8372F2C1694}"/>
+                <a16:creationId xmlns="" xmlns:a16="http://schemas.microsoft.com/office/drawing/2014/main" id="{D3F062A5-E36B-5C05-6C36-F8372F2C1694}"/>
               </a:ext>
             </a:extLst>
           </p:cNvPr>
@@ -6940,7 +6940,7 @@
     </p:spTree>
     <p:extLst>
       <p:ext uri="{BB962C8B-B14F-4D97-AF65-F5344CB8AC3E}">
-        <p14:creationId xmlns:p14="http://schemas.microsoft.com/office/powerpoint/2010/main" xmlns="" val="1890550858"/>
+        <p14:creationId xmlns="" xmlns:p14="http://schemas.microsoft.com/office/powerpoint/2010/main" val="1890550858"/>
       </p:ext>
     </p:extLst>
   </p:cSld>
@@ -6972,7 +6972,7 @@
           <p:cNvPr id="2" name="Title 1">
             <a:extLst>
               <a:ext uri="{FF2B5EF4-FFF2-40B4-BE49-F238E27FC236}">
-                <a16:creationId xmlns:a16="http://schemas.microsoft.com/office/drawing/2014/main" xmlns="" id="{2822CC90-B089-5E25-D480-B40D5123BFB5}"/>
+                <a16:creationId xmlns="" xmlns:a16="http://schemas.microsoft.com/office/drawing/2014/main" id="{2822CC90-B089-5E25-D480-B40D5123BFB5}"/>
               </a:ext>
             </a:extLst>
           </p:cNvPr>
@@ -7010,7 +7010,7 @@
           <p:cNvPr id="3" name="Text Placeholder 2">
             <a:extLst>
               <a:ext uri="{FF2B5EF4-FFF2-40B4-BE49-F238E27FC236}">
-                <a16:creationId xmlns:a16="http://schemas.microsoft.com/office/drawing/2014/main" xmlns="" id="{9E671185-327E-E435-EB8B-F143CAF78D5D}"/>
+                <a16:creationId xmlns="" xmlns:a16="http://schemas.microsoft.com/office/drawing/2014/main" id="{9E671185-327E-E435-EB8B-F143CAF78D5D}"/>
               </a:ext>
             </a:extLst>
           </p:cNvPr>
@@ -7135,7 +7135,7 @@
           <p:cNvPr id="4" name="Date Placeholder 3">
             <a:extLst>
               <a:ext uri="{FF2B5EF4-FFF2-40B4-BE49-F238E27FC236}">
-                <a16:creationId xmlns:a16="http://schemas.microsoft.com/office/drawing/2014/main" xmlns="" id="{47ADDF86-F686-ACE8-6852-5CEADD9A2870}"/>
+                <a16:creationId xmlns="" xmlns:a16="http://schemas.microsoft.com/office/drawing/2014/main" id="{47ADDF86-F686-ACE8-6852-5CEADD9A2870}"/>
               </a:ext>
             </a:extLst>
           </p:cNvPr>
@@ -7154,7 +7154,7 @@
             <a:fld id="{2B3E8F52-857A-4C89-954C-57943DB51290}" type="datetime1">
               <a:rPr lang="en-IN" smtClean="0"/>
               <a:pPr/>
-              <a:t>15-01-2026</a:t>
+              <a:t>22-04-2026</a:t>
             </a:fld>
             <a:endParaRPr lang="en-IN" dirty="0"/>
           </a:p>
@@ -7165,7 +7165,7 @@
           <p:cNvPr id="5" name="Footer Placeholder 4">
             <a:extLst>
               <a:ext uri="{FF2B5EF4-FFF2-40B4-BE49-F238E27FC236}">
-                <a16:creationId xmlns:a16="http://schemas.microsoft.com/office/drawing/2014/main" xmlns="" id="{8558F106-1FED-5AA1-CFDF-7FE210507170}"/>
+                <a16:creationId xmlns="" xmlns:a16="http://schemas.microsoft.com/office/drawing/2014/main" id="{8558F106-1FED-5AA1-CFDF-7FE210507170}"/>
               </a:ext>
             </a:extLst>
           </p:cNvPr>
@@ -7190,7 +7190,7 @@
           <p:cNvPr id="6" name="Slide Number Placeholder 5">
             <a:extLst>
               <a:ext uri="{FF2B5EF4-FFF2-40B4-BE49-F238E27FC236}">
-                <a16:creationId xmlns:a16="http://schemas.microsoft.com/office/drawing/2014/main" xmlns="" id="{FD45F0D7-F550-D351-1F6B-36B665CA0CDC}"/>
+                <a16:creationId xmlns="" xmlns:a16="http://schemas.microsoft.com/office/drawing/2014/main" id="{FD45F0D7-F550-D351-1F6B-36B665CA0CDC}"/>
               </a:ext>
             </a:extLst>
           </p:cNvPr>
@@ -7218,7 +7218,7 @@
     </p:spTree>
     <p:extLst>
       <p:ext uri="{BB962C8B-B14F-4D97-AF65-F5344CB8AC3E}">
-        <p14:creationId xmlns:p14="http://schemas.microsoft.com/office/powerpoint/2010/main" xmlns="" val="3705203951"/>
+        <p14:creationId xmlns="" xmlns:p14="http://schemas.microsoft.com/office/powerpoint/2010/main" val="3705203951"/>
       </p:ext>
     </p:extLst>
   </p:cSld>
@@ -7250,7 +7250,7 @@
           <p:cNvPr id="2" name="Title 1">
             <a:extLst>
               <a:ext uri="{FF2B5EF4-FFF2-40B4-BE49-F238E27FC236}">
-                <a16:creationId xmlns:a16="http://schemas.microsoft.com/office/drawing/2014/main" xmlns="" id="{C6698191-3055-3CE7-ABAB-BF522556896A}"/>
+                <a16:creationId xmlns="" xmlns:a16="http://schemas.microsoft.com/office/drawing/2014/main" id="{C6698191-3055-3CE7-ABAB-BF522556896A}"/>
               </a:ext>
             </a:extLst>
           </p:cNvPr>
@@ -7279,7 +7279,7 @@
           <p:cNvPr id="3" name="Content Placeholder 2">
             <a:extLst>
               <a:ext uri="{FF2B5EF4-FFF2-40B4-BE49-F238E27FC236}">
-                <a16:creationId xmlns:a16="http://schemas.microsoft.com/office/drawing/2014/main" xmlns="" id="{FB07F01E-C1BB-CFE3-1062-5A8CAD20F5A2}"/>
+                <a16:creationId xmlns="" xmlns:a16="http://schemas.microsoft.com/office/drawing/2014/main" id="{FB07F01E-C1BB-CFE3-1062-5A8CAD20F5A2}"/>
               </a:ext>
             </a:extLst>
           </p:cNvPr>
@@ -7342,7 +7342,7 @@
           <p:cNvPr id="4" name="Content Placeholder 3">
             <a:extLst>
               <a:ext uri="{FF2B5EF4-FFF2-40B4-BE49-F238E27FC236}">
-                <a16:creationId xmlns:a16="http://schemas.microsoft.com/office/drawing/2014/main" xmlns="" id="{290F16ED-635D-3C12-AE3C-37A43EAF1462}"/>
+                <a16:creationId xmlns="" xmlns:a16="http://schemas.microsoft.com/office/drawing/2014/main" id="{290F16ED-635D-3C12-AE3C-37A43EAF1462}"/>
               </a:ext>
             </a:extLst>
           </p:cNvPr>
@@ -7405,7 +7405,7 @@
           <p:cNvPr id="5" name="Date Placeholder 4">
             <a:extLst>
               <a:ext uri="{FF2B5EF4-FFF2-40B4-BE49-F238E27FC236}">
-                <a16:creationId xmlns:a16="http://schemas.microsoft.com/office/drawing/2014/main" xmlns="" id="{BA80B84D-A3CA-9B7E-B7BB-4C18C18121B2}"/>
+                <a16:creationId xmlns="" xmlns:a16="http://schemas.microsoft.com/office/drawing/2014/main" id="{BA80B84D-A3CA-9B7E-B7BB-4C18C18121B2}"/>
               </a:ext>
             </a:extLst>
           </p:cNvPr>
@@ -7424,7 +7424,7 @@
             <a:fld id="{2BBD7B4D-DDD6-4CA2-87A0-9BDD5E5268EC}" type="datetime1">
               <a:rPr lang="en-IN" smtClean="0"/>
               <a:pPr/>
-              <a:t>15-01-2026</a:t>
+              <a:t>22-04-2026</a:t>
             </a:fld>
             <a:endParaRPr lang="en-IN" dirty="0"/>
           </a:p>
@@ -7435,7 +7435,7 @@
           <p:cNvPr id="6" name="Footer Placeholder 5">
             <a:extLst>
               <a:ext uri="{FF2B5EF4-FFF2-40B4-BE49-F238E27FC236}">
-                <a16:creationId xmlns:a16="http://schemas.microsoft.com/office/drawing/2014/main" xmlns="" id="{05881B66-06CA-0AE9-B95B-21A45DC5B355}"/>
+                <a16:creationId xmlns="" xmlns:a16="http://schemas.microsoft.com/office/drawing/2014/main" id="{05881B66-06CA-0AE9-B95B-21A45DC5B355}"/>
               </a:ext>
             </a:extLst>
           </p:cNvPr>
@@ -7460,7 +7460,7 @@
           <p:cNvPr id="7" name="Slide Number Placeholder 6">
             <a:extLst>
               <a:ext uri="{FF2B5EF4-FFF2-40B4-BE49-F238E27FC236}">
-                <a16:creationId xmlns:a16="http://schemas.microsoft.com/office/drawing/2014/main" xmlns="" id="{F4B7665D-74F3-FC85-8C37-77F440223274}"/>
+                <a16:creationId xmlns="" xmlns:a16="http://schemas.microsoft.com/office/drawing/2014/main" id="{F4B7665D-74F3-FC85-8C37-77F440223274}"/>
               </a:ext>
             </a:extLst>
           </p:cNvPr>
@@ -7488,7 +7488,7 @@
     </p:spTree>
     <p:extLst>
       <p:ext uri="{BB962C8B-B14F-4D97-AF65-F5344CB8AC3E}">
-        <p14:creationId xmlns:p14="http://schemas.microsoft.com/office/powerpoint/2010/main" xmlns="" val="2479702389"/>
+        <p14:creationId xmlns="" xmlns:p14="http://schemas.microsoft.com/office/powerpoint/2010/main" val="2479702389"/>
       </p:ext>
     </p:extLst>
   </p:cSld>
@@ -7520,7 +7520,7 @@
           <p:cNvPr id="2" name="Title 1">
             <a:extLst>
               <a:ext uri="{FF2B5EF4-FFF2-40B4-BE49-F238E27FC236}">
-                <a16:creationId xmlns:a16="http://schemas.microsoft.com/office/drawing/2014/main" xmlns="" id="{66F1306E-11E1-8AB1-AF32-6F074D3C8515}"/>
+                <a16:creationId xmlns="" xmlns:a16="http://schemas.microsoft.com/office/drawing/2014/main" id="{66F1306E-11E1-8AB1-AF32-6F074D3C8515}"/>
               </a:ext>
             </a:extLst>
           </p:cNvPr>
@@ -7554,7 +7554,7 @@
           <p:cNvPr id="3" name="Text Placeholder 2">
             <a:extLst>
               <a:ext uri="{FF2B5EF4-FFF2-40B4-BE49-F238E27FC236}">
-                <a16:creationId xmlns:a16="http://schemas.microsoft.com/office/drawing/2014/main" xmlns="" id="{E38E7AAE-4628-F916-89C8-10A970EC982C}"/>
+                <a16:creationId xmlns="" xmlns:a16="http://schemas.microsoft.com/office/drawing/2014/main" id="{E38E7AAE-4628-F916-89C8-10A970EC982C}"/>
               </a:ext>
             </a:extLst>
           </p:cNvPr>
@@ -7625,7 +7625,7 @@
           <p:cNvPr id="4" name="Content Placeholder 3">
             <a:extLst>
               <a:ext uri="{FF2B5EF4-FFF2-40B4-BE49-F238E27FC236}">
-                <a16:creationId xmlns:a16="http://schemas.microsoft.com/office/drawing/2014/main" xmlns="" id="{98D7C0B7-4F02-5995-1FB1-8FB2DD12598C}"/>
+                <a16:creationId xmlns="" xmlns:a16="http://schemas.microsoft.com/office/drawing/2014/main" id="{98D7C0B7-4F02-5995-1FB1-8FB2DD12598C}"/>
               </a:ext>
             </a:extLst>
           </p:cNvPr>
@@ -7688,7 +7688,7 @@
           <p:cNvPr id="5" name="Text Placeholder 4">
             <a:extLst>
               <a:ext uri="{FF2B5EF4-FFF2-40B4-BE49-F238E27FC236}">
-                <a16:creationId xmlns:a16="http://schemas.microsoft.com/office/drawing/2014/main" xmlns="" id="{4B504026-A61A-C06F-3EA6-94F595A4738B}"/>
+                <a16:creationId xmlns="" xmlns:a16="http://schemas.microsoft.com/office/drawing/2014/main" id="{4B504026-A61A-C06F-3EA6-94F595A4738B}"/>
               </a:ext>
             </a:extLst>
           </p:cNvPr>
@@ -7759,7 +7759,7 @@
           <p:cNvPr id="6" name="Content Placeholder 5">
             <a:extLst>
               <a:ext uri="{FF2B5EF4-FFF2-40B4-BE49-F238E27FC236}">
-                <a16:creationId xmlns:a16="http://schemas.microsoft.com/office/drawing/2014/main" xmlns="" id="{4CFF7FD0-380B-75A4-D9B0-F7EBC341DD01}"/>
+                <a16:creationId xmlns="" xmlns:a16="http://schemas.microsoft.com/office/drawing/2014/main" id="{4CFF7FD0-380B-75A4-D9B0-F7EBC341DD01}"/>
               </a:ext>
             </a:extLst>
           </p:cNvPr>
@@ -7822,7 +7822,7 @@
           <p:cNvPr id="7" name="Date Placeholder 6">
             <a:extLst>
               <a:ext uri="{FF2B5EF4-FFF2-40B4-BE49-F238E27FC236}">
-                <a16:creationId xmlns:a16="http://schemas.microsoft.com/office/drawing/2014/main" xmlns="" id="{C80AA233-A9EB-E98D-4DDF-BC4B72808326}"/>
+                <a16:creationId xmlns="" xmlns:a16="http://schemas.microsoft.com/office/drawing/2014/main" id="{C80AA233-A9EB-E98D-4DDF-BC4B72808326}"/>
               </a:ext>
             </a:extLst>
           </p:cNvPr>
@@ -7841,7 +7841,7 @@
             <a:fld id="{C130D9E5-0635-43A8-8973-488E7408FAF7}" type="datetime1">
               <a:rPr lang="en-IN" smtClean="0"/>
               <a:pPr/>
-              <a:t>15-01-2026</a:t>
+              <a:t>22-04-2026</a:t>
             </a:fld>
             <a:endParaRPr lang="en-IN" dirty="0"/>
           </a:p>
@@ -7852,7 +7852,7 @@
           <p:cNvPr id="8" name="Footer Placeholder 7">
             <a:extLst>
               <a:ext uri="{FF2B5EF4-FFF2-40B4-BE49-F238E27FC236}">
-                <a16:creationId xmlns:a16="http://schemas.microsoft.com/office/drawing/2014/main" xmlns="" id="{755E8074-1361-E322-F42C-F5D71409910F}"/>
+                <a16:creationId xmlns="" xmlns:a16="http://schemas.microsoft.com/office/drawing/2014/main" id="{755E8074-1361-E322-F42C-F5D71409910F}"/>
               </a:ext>
             </a:extLst>
           </p:cNvPr>
@@ -7877,7 +7877,7 @@
           <p:cNvPr id="9" name="Slide Number Placeholder 8">
             <a:extLst>
               <a:ext uri="{FF2B5EF4-FFF2-40B4-BE49-F238E27FC236}">
-                <a16:creationId xmlns:a16="http://schemas.microsoft.com/office/drawing/2014/main" xmlns="" id="{56B9FECA-EE46-D87A-F259-E8022C3628B1}"/>
+                <a16:creationId xmlns="" xmlns:a16="http://schemas.microsoft.com/office/drawing/2014/main" id="{56B9FECA-EE46-D87A-F259-E8022C3628B1}"/>
               </a:ext>
             </a:extLst>
           </p:cNvPr>
@@ -7905,7 +7905,7 @@
     </p:spTree>
     <p:extLst>
       <p:ext uri="{BB962C8B-B14F-4D97-AF65-F5344CB8AC3E}">
-        <p14:creationId xmlns:p14="http://schemas.microsoft.com/office/powerpoint/2010/main" xmlns="" val="3263430401"/>
+        <p14:creationId xmlns="" xmlns:p14="http://schemas.microsoft.com/office/powerpoint/2010/main" val="3263430401"/>
       </p:ext>
     </p:extLst>
   </p:cSld>
@@ -7937,7 +7937,7 @@
           <p:cNvPr id="2" name="Title 1">
             <a:extLst>
               <a:ext uri="{FF2B5EF4-FFF2-40B4-BE49-F238E27FC236}">
-                <a16:creationId xmlns:a16="http://schemas.microsoft.com/office/drawing/2014/main" xmlns="" id="{39DB92FB-DA41-9013-AE3A-5882CEEE8BF7}"/>
+                <a16:creationId xmlns="" xmlns:a16="http://schemas.microsoft.com/office/drawing/2014/main" id="{39DB92FB-DA41-9013-AE3A-5882CEEE8BF7}"/>
               </a:ext>
             </a:extLst>
           </p:cNvPr>
@@ -7966,7 +7966,7 @@
           <p:cNvPr id="3" name="Date Placeholder 2">
             <a:extLst>
               <a:ext uri="{FF2B5EF4-FFF2-40B4-BE49-F238E27FC236}">
-                <a16:creationId xmlns:a16="http://schemas.microsoft.com/office/drawing/2014/main" xmlns="" id="{9A2620A1-C0CA-1D0E-E85E-5C1326F8CB80}"/>
+                <a16:creationId xmlns="" xmlns:a16="http://schemas.microsoft.com/office/drawing/2014/main" id="{9A2620A1-C0CA-1D0E-E85E-5C1326F8CB80}"/>
               </a:ext>
             </a:extLst>
           </p:cNvPr>
@@ -7985,7 +7985,7 @@
             <a:fld id="{E1D0CEA8-D591-4CC9-939A-A3BE6FD93E89}" type="datetime1">
               <a:rPr lang="en-IN" smtClean="0"/>
               <a:pPr/>
-              <a:t>15-01-2026</a:t>
+              <a:t>22-04-2026</a:t>
             </a:fld>
             <a:endParaRPr lang="en-IN" dirty="0"/>
           </a:p>
@@ -7996,7 +7996,7 @@
           <p:cNvPr id="4" name="Footer Placeholder 3">
             <a:extLst>
               <a:ext uri="{FF2B5EF4-FFF2-40B4-BE49-F238E27FC236}">
-                <a16:creationId xmlns:a16="http://schemas.microsoft.com/office/drawing/2014/main" xmlns="" id="{763BD8B1-5363-075D-CDCC-8CAC0A6A78E8}"/>
+                <a16:creationId xmlns="" xmlns:a16="http://schemas.microsoft.com/office/drawing/2014/main" id="{763BD8B1-5363-075D-CDCC-8CAC0A6A78E8}"/>
               </a:ext>
             </a:extLst>
           </p:cNvPr>
@@ -8021,7 +8021,7 @@
           <p:cNvPr id="5" name="Slide Number Placeholder 4">
             <a:extLst>
               <a:ext uri="{FF2B5EF4-FFF2-40B4-BE49-F238E27FC236}">
-                <a16:creationId xmlns:a16="http://schemas.microsoft.com/office/drawing/2014/main" xmlns="" id="{46E4555F-1DC7-94CF-74D7-21521EE9398A}"/>
+                <a16:creationId xmlns="" xmlns:a16="http://schemas.microsoft.com/office/drawing/2014/main" id="{46E4555F-1DC7-94CF-74D7-21521EE9398A}"/>
               </a:ext>
             </a:extLst>
           </p:cNvPr>
@@ -8049,7 +8049,7 @@
     </p:spTree>
     <p:extLst>
       <p:ext uri="{BB962C8B-B14F-4D97-AF65-F5344CB8AC3E}">
-        <p14:creationId xmlns:p14="http://schemas.microsoft.com/office/powerpoint/2010/main" xmlns="" val="996821849"/>
+        <p14:creationId xmlns="" xmlns:p14="http://schemas.microsoft.com/office/powerpoint/2010/main" val="996821849"/>
       </p:ext>
     </p:extLst>
   </p:cSld>
@@ -8081,7 +8081,7 @@
           <p:cNvPr id="2" name="Date Placeholder 1">
             <a:extLst>
               <a:ext uri="{FF2B5EF4-FFF2-40B4-BE49-F238E27FC236}">
-                <a16:creationId xmlns:a16="http://schemas.microsoft.com/office/drawing/2014/main" xmlns="" id="{7B497F04-5F5B-E4F7-0A48-A1FBAC01C3C4}"/>
+                <a16:creationId xmlns="" xmlns:a16="http://schemas.microsoft.com/office/drawing/2014/main" id="{7B497F04-5F5B-E4F7-0A48-A1FBAC01C3C4}"/>
               </a:ext>
             </a:extLst>
           </p:cNvPr>
@@ -8100,7 +8100,7 @@
             <a:fld id="{D2BE2297-DC8B-48E6-B6D6-34773F9A5984}" type="datetime1">
               <a:rPr lang="en-IN" smtClean="0"/>
               <a:pPr/>
-              <a:t>15-01-2026</a:t>
+              <a:t>22-04-2026</a:t>
             </a:fld>
             <a:endParaRPr lang="en-IN" dirty="0"/>
           </a:p>
@@ -8111,7 +8111,7 @@
           <p:cNvPr id="3" name="Footer Placeholder 2">
             <a:extLst>
               <a:ext uri="{FF2B5EF4-FFF2-40B4-BE49-F238E27FC236}">
-                <a16:creationId xmlns:a16="http://schemas.microsoft.com/office/drawing/2014/main" xmlns="" id="{3EDCC3BA-DF88-8CE4-AB31-983A3C796AD3}"/>
+                <a16:creationId xmlns="" xmlns:a16="http://schemas.microsoft.com/office/drawing/2014/main" id="{3EDCC3BA-DF88-8CE4-AB31-983A3C796AD3}"/>
               </a:ext>
             </a:extLst>
           </p:cNvPr>
@@ -8136,7 +8136,7 @@
           <p:cNvPr id="4" name="Slide Number Placeholder 3">
             <a:extLst>
               <a:ext uri="{FF2B5EF4-FFF2-40B4-BE49-F238E27FC236}">
-                <a16:creationId xmlns:a16="http://schemas.microsoft.com/office/drawing/2014/main" xmlns="" id="{2817982A-25A2-0FA2-0BC4-48C8775F8459}"/>
+                <a16:creationId xmlns="" xmlns:a16="http://schemas.microsoft.com/office/drawing/2014/main" id="{2817982A-25A2-0FA2-0BC4-48C8775F8459}"/>
               </a:ext>
             </a:extLst>
           </p:cNvPr>
@@ -8164,7 +8164,7 @@
     </p:spTree>
     <p:extLst>
       <p:ext uri="{BB962C8B-B14F-4D97-AF65-F5344CB8AC3E}">
-        <p14:creationId xmlns:p14="http://schemas.microsoft.com/office/powerpoint/2010/main" xmlns="" val="3113842662"/>
+        <p14:creationId xmlns="" xmlns:p14="http://schemas.microsoft.com/office/powerpoint/2010/main" val="3113842662"/>
       </p:ext>
     </p:extLst>
   </p:cSld>
@@ -8196,7 +8196,7 @@
           <p:cNvPr id="2" name="Title 1">
             <a:extLst>
               <a:ext uri="{FF2B5EF4-FFF2-40B4-BE49-F238E27FC236}">
-                <a16:creationId xmlns:a16="http://schemas.microsoft.com/office/drawing/2014/main" xmlns="" id="{F9217936-1384-3D53-34C7-E638688EFD97}"/>
+                <a16:creationId xmlns="" xmlns:a16="http://schemas.microsoft.com/office/drawing/2014/main" id="{F9217936-1384-3D53-34C7-E638688EFD97}"/>
               </a:ext>
             </a:extLst>
           </p:cNvPr>
@@ -8234,7 +8234,7 @@
           <p:cNvPr id="3" name="Content Placeholder 2">
             <a:extLst>
               <a:ext uri="{FF2B5EF4-FFF2-40B4-BE49-F238E27FC236}">
-                <a16:creationId xmlns:a16="http://schemas.microsoft.com/office/drawing/2014/main" xmlns="" id="{F4108029-8ADE-BDA5-4C8D-31C361556483}"/>
+                <a16:creationId xmlns="" xmlns:a16="http://schemas.microsoft.com/office/drawing/2014/main" id="{F4108029-8ADE-BDA5-4C8D-31C361556483}"/>
               </a:ext>
             </a:extLst>
           </p:cNvPr>
@@ -8325,7 +8325,7 @@
           <p:cNvPr id="4" name="Text Placeholder 3">
             <a:extLst>
               <a:ext uri="{FF2B5EF4-FFF2-40B4-BE49-F238E27FC236}">
-                <a16:creationId xmlns:a16="http://schemas.microsoft.com/office/drawing/2014/main" xmlns="" id="{6D6CB47A-C96A-8918-E1EB-9A8DBEC72754}"/>
+                <a16:creationId xmlns="" xmlns:a16="http://schemas.microsoft.com/office/drawing/2014/main" id="{6D6CB47A-C96A-8918-E1EB-9A8DBEC72754}"/>
               </a:ext>
             </a:extLst>
           </p:cNvPr>
@@ -8396,7 +8396,7 @@
           <p:cNvPr id="5" name="Date Placeholder 4">
             <a:extLst>
               <a:ext uri="{FF2B5EF4-FFF2-40B4-BE49-F238E27FC236}">
-                <a16:creationId xmlns:a16="http://schemas.microsoft.com/office/drawing/2014/main" xmlns="" id="{ED65CB0D-C5CF-96B6-5923-222D7E403E92}"/>
+                <a16:creationId xmlns="" xmlns:a16="http://schemas.microsoft.com/office/drawing/2014/main" id="{ED65CB0D-C5CF-96B6-5923-222D7E403E92}"/>
               </a:ext>
             </a:extLst>
           </p:cNvPr>
@@ -8415,7 +8415,7 @@
             <a:fld id="{64C2A547-6E4B-4188-9BD5-035CB9C4BCC5}" type="datetime1">
               <a:rPr lang="en-IN" smtClean="0"/>
               <a:pPr/>
-              <a:t>15-01-2026</a:t>
+              <a:t>22-04-2026</a:t>
             </a:fld>
             <a:endParaRPr lang="en-IN" dirty="0"/>
           </a:p>
@@ -8426,7 +8426,7 @@
           <p:cNvPr id="6" name="Footer Placeholder 5">
             <a:extLst>
               <a:ext uri="{FF2B5EF4-FFF2-40B4-BE49-F238E27FC236}">
-                <a16:creationId xmlns:a16="http://schemas.microsoft.com/office/drawing/2014/main" xmlns="" id="{C9A0E17E-D21B-9F95-DB42-019C9AB18CB9}"/>
+                <a16:creationId xmlns="" xmlns:a16="http://schemas.microsoft.com/office/drawing/2014/main" id="{C9A0E17E-D21B-9F95-DB42-019C9AB18CB9}"/>
               </a:ext>
             </a:extLst>
           </p:cNvPr>
@@ -8451,7 +8451,7 @@
           <p:cNvPr id="7" name="Slide Number Placeholder 6">
             <a:extLst>
               <a:ext uri="{FF2B5EF4-FFF2-40B4-BE49-F238E27FC236}">
-                <a16:creationId xmlns:a16="http://schemas.microsoft.com/office/drawing/2014/main" xmlns="" id="{2431A4E0-3F3F-3857-C2B7-EEDD3DF99CB1}"/>
+                <a16:creationId xmlns="" xmlns:a16="http://schemas.microsoft.com/office/drawing/2014/main" id="{2431A4E0-3F3F-3857-C2B7-EEDD3DF99CB1}"/>
               </a:ext>
             </a:extLst>
           </p:cNvPr>
@@ -8479,7 +8479,7 @@
     </p:spTree>
     <p:extLst>
       <p:ext uri="{BB962C8B-B14F-4D97-AF65-F5344CB8AC3E}">
-        <p14:creationId xmlns:p14="http://schemas.microsoft.com/office/powerpoint/2010/main" xmlns="" val="1923921697"/>
+        <p14:creationId xmlns="" xmlns:p14="http://schemas.microsoft.com/office/powerpoint/2010/main" val="1923921697"/>
       </p:ext>
     </p:extLst>
   </p:cSld>
@@ -8511,7 +8511,7 @@
           <p:cNvPr id="2" name="Title 1">
             <a:extLst>
               <a:ext uri="{FF2B5EF4-FFF2-40B4-BE49-F238E27FC236}">
-                <a16:creationId xmlns:a16="http://schemas.microsoft.com/office/drawing/2014/main" xmlns="" id="{45BEDF05-F2AE-B072-8E2E-CB4CF5B08FC5}"/>
+                <a16:creationId xmlns="" xmlns:a16="http://schemas.microsoft.com/office/drawing/2014/main" id="{45BEDF05-F2AE-B072-8E2E-CB4CF5B08FC5}"/>
               </a:ext>
             </a:extLst>
           </p:cNvPr>
@@ -8549,7 +8549,7 @@
           <p:cNvPr id="3" name="Picture Placeholder 2">
             <a:extLst>
               <a:ext uri="{FF2B5EF4-FFF2-40B4-BE49-F238E27FC236}">
-                <a16:creationId xmlns:a16="http://schemas.microsoft.com/office/drawing/2014/main" xmlns="" id="{B20EF8F1-DFA6-282F-E8CD-83826A12E495}"/>
+                <a16:creationId xmlns="" xmlns:a16="http://schemas.microsoft.com/office/drawing/2014/main" id="{B20EF8F1-DFA6-282F-E8CD-83826A12E495}"/>
               </a:ext>
             </a:extLst>
           </p:cNvPr>
@@ -8616,7 +8616,7 @@
           <p:cNvPr id="4" name="Text Placeholder 3">
             <a:extLst>
               <a:ext uri="{FF2B5EF4-FFF2-40B4-BE49-F238E27FC236}">
-                <a16:creationId xmlns:a16="http://schemas.microsoft.com/office/drawing/2014/main" xmlns="" id="{85808D68-B430-9A5B-4A9B-8549EA20AC88}"/>
+                <a16:creationId xmlns="" xmlns:a16="http://schemas.microsoft.com/office/drawing/2014/main" id="{85808D68-B430-9A5B-4A9B-8549EA20AC88}"/>
               </a:ext>
             </a:extLst>
           </p:cNvPr>
@@ -8687,7 +8687,7 @@
           <p:cNvPr id="5" name="Date Placeholder 4">
             <a:extLst>
               <a:ext uri="{FF2B5EF4-FFF2-40B4-BE49-F238E27FC236}">
-                <a16:creationId xmlns:a16="http://schemas.microsoft.com/office/drawing/2014/main" xmlns="" id="{A0002EBD-67C3-A4B8-A83C-896997C53EB8}"/>
+                <a16:creationId xmlns="" xmlns:a16="http://schemas.microsoft.com/office/drawing/2014/main" id="{A0002EBD-67C3-A4B8-A83C-896997C53EB8}"/>
               </a:ext>
             </a:extLst>
           </p:cNvPr>
@@ -8706,7 +8706,7 @@
             <a:fld id="{02706E29-16A1-4AAE-B55B-4E3DB7265605}" type="datetime1">
               <a:rPr lang="en-IN" smtClean="0"/>
               <a:pPr/>
-              <a:t>15-01-2026</a:t>
+              <a:t>22-04-2026</a:t>
             </a:fld>
             <a:endParaRPr lang="en-IN" dirty="0"/>
           </a:p>
@@ -8717,7 +8717,7 @@
           <p:cNvPr id="6" name="Footer Placeholder 5">
             <a:extLst>
               <a:ext uri="{FF2B5EF4-FFF2-40B4-BE49-F238E27FC236}">
-                <a16:creationId xmlns:a16="http://schemas.microsoft.com/office/drawing/2014/main" xmlns="" id="{92B00B68-5333-C602-6799-3D1B2E434B21}"/>
+                <a16:creationId xmlns="" xmlns:a16="http://schemas.microsoft.com/office/drawing/2014/main" id="{92B00B68-5333-C602-6799-3D1B2E434B21}"/>
               </a:ext>
             </a:extLst>
           </p:cNvPr>
@@ -8742,7 +8742,7 @@
           <p:cNvPr id="7" name="Slide Number Placeholder 6">
             <a:extLst>
               <a:ext uri="{FF2B5EF4-FFF2-40B4-BE49-F238E27FC236}">
-                <a16:creationId xmlns:a16="http://schemas.microsoft.com/office/drawing/2014/main" xmlns="" id="{304925F4-1AF9-E8B5-0534-4714B5FAF5DD}"/>
+                <a16:creationId xmlns="" xmlns:a16="http://schemas.microsoft.com/office/drawing/2014/main" id="{304925F4-1AF9-E8B5-0534-4714B5FAF5DD}"/>
               </a:ext>
             </a:extLst>
           </p:cNvPr>
@@ -8770,7 +8770,7 @@
     </p:spTree>
     <p:extLst>
       <p:ext uri="{BB962C8B-B14F-4D97-AF65-F5344CB8AC3E}">
-        <p14:creationId xmlns:p14="http://schemas.microsoft.com/office/powerpoint/2010/main" xmlns="" val="479996970"/>
+        <p14:creationId xmlns="" xmlns:p14="http://schemas.microsoft.com/office/powerpoint/2010/main" val="479996970"/>
       </p:ext>
     </p:extLst>
   </p:cSld>
@@ -8816,7 +8816,7 @@
           <p:cNvPr id="2" name="Title Placeholder 1">
             <a:extLst>
               <a:ext uri="{FF2B5EF4-FFF2-40B4-BE49-F238E27FC236}">
-                <a16:creationId xmlns:a16="http://schemas.microsoft.com/office/drawing/2014/main" xmlns="" id="{6309843D-C7AC-7DCA-D2A1-30C29BBAB6D8}"/>
+                <a16:creationId xmlns="" xmlns:a16="http://schemas.microsoft.com/office/drawing/2014/main" id="{6309843D-C7AC-7DCA-D2A1-30C29BBAB6D8}"/>
               </a:ext>
             </a:extLst>
           </p:cNvPr>
@@ -8855,7 +8855,7 @@
           <p:cNvPr id="3" name="Text Placeholder 2">
             <a:extLst>
               <a:ext uri="{FF2B5EF4-FFF2-40B4-BE49-F238E27FC236}">
-                <a16:creationId xmlns:a16="http://schemas.microsoft.com/office/drawing/2014/main" xmlns="" id="{662A0867-11DA-F019-8907-1B3D8BD7C7ED}"/>
+                <a16:creationId xmlns="" xmlns:a16="http://schemas.microsoft.com/office/drawing/2014/main" id="{662A0867-11DA-F019-8907-1B3D8BD7C7ED}"/>
               </a:ext>
             </a:extLst>
           </p:cNvPr>
@@ -8923,7 +8923,7 @@
           <p:cNvPr id="4" name="Date Placeholder 3">
             <a:extLst>
               <a:ext uri="{FF2B5EF4-FFF2-40B4-BE49-F238E27FC236}">
-                <a16:creationId xmlns:a16="http://schemas.microsoft.com/office/drawing/2014/main" xmlns="" id="{500DD53F-CA45-CCAE-9ADB-5B0F61393A10}"/>
+                <a16:creationId xmlns="" xmlns:a16="http://schemas.microsoft.com/office/drawing/2014/main" id="{500DD53F-CA45-CCAE-9ADB-5B0F61393A10}"/>
               </a:ext>
             </a:extLst>
           </p:cNvPr>
@@ -8960,7 +8960,7 @@
             <a:fld id="{2EAC608B-7A9F-4336-97A2-89908E443DAD}" type="datetime1">
               <a:rPr lang="en-IN" smtClean="0"/>
               <a:pPr/>
-              <a:t>15-01-2026</a:t>
+              <a:t>22-04-2026</a:t>
             </a:fld>
             <a:endParaRPr lang="en-IN" dirty="0"/>
           </a:p>
@@ -8971,7 +8971,7 @@
           <p:cNvPr id="5" name="Footer Placeholder 4">
             <a:extLst>
               <a:ext uri="{FF2B5EF4-FFF2-40B4-BE49-F238E27FC236}">
-                <a16:creationId xmlns:a16="http://schemas.microsoft.com/office/drawing/2014/main" xmlns="" id="{1C91FF70-F320-3E09-D811-B610D38CEA74}"/>
+                <a16:creationId xmlns="" xmlns:a16="http://schemas.microsoft.com/office/drawing/2014/main" id="{1C91FF70-F320-3E09-D811-B610D38CEA74}"/>
               </a:ext>
             </a:extLst>
           </p:cNvPr>
@@ -9014,7 +9014,7 @@
           <p:cNvPr id="6" name="Slide Number Placeholder 5">
             <a:extLst>
               <a:ext uri="{FF2B5EF4-FFF2-40B4-BE49-F238E27FC236}">
-                <a16:creationId xmlns:a16="http://schemas.microsoft.com/office/drawing/2014/main" xmlns="" id="{999947EA-7073-9466-0549-46E86F1C89F8}"/>
+                <a16:creationId xmlns="" xmlns:a16="http://schemas.microsoft.com/office/drawing/2014/main" id="{999947EA-7073-9466-0549-46E86F1C89F8}"/>
               </a:ext>
             </a:extLst>
           </p:cNvPr>
@@ -9060,7 +9060,7 @@
     </p:spTree>
     <p:extLst>
       <p:ext uri="{BB962C8B-B14F-4D97-AF65-F5344CB8AC3E}">
-        <p14:creationId xmlns:p14="http://schemas.microsoft.com/office/powerpoint/2010/main" xmlns="" val="204194521"/>
+        <p14:creationId xmlns="" xmlns:p14="http://schemas.microsoft.com/office/powerpoint/2010/main" val="204194521"/>
       </p:ext>
     </p:extLst>
   </p:cSld>
@@ -9517,19 +9517,7 @@
                 <a:cs typeface="Verdana"/>
                 <a:sym typeface="Verdana"/>
               </a:rPr>
-              <a:t>Assistant </a:t>
-            </a:r>
-            <a:r>
-              <a:rPr lang="en-GB" sz="1700" b="1" i="0" u="none" strike="noStrike" cap="none" dirty="0">
-                <a:solidFill>
-                  <a:srgbClr val="17365D"/>
-                </a:solidFill>
-                <a:latin typeface="Cambria" panose="02040503050406030204" pitchFamily="18" charset="0"/>
-                <a:ea typeface="Cambria" panose="02040503050406030204" pitchFamily="18" charset="0"/>
-                <a:cs typeface="Verdana"/>
-                <a:sym typeface="Verdana"/>
-              </a:rPr>
-              <a:t>Professor</a:t>
+              <a:t>Assistant Professor - PSCS</a:t>
             </a:r>
             <a:endParaRPr dirty="0">
               <a:latin typeface="Cambria" panose="02040503050406030204" pitchFamily="18" charset="0"/>
@@ -9642,219 +9630,6 @@
             <a:endParaRPr sz="2000" b="1" i="0" u="none" strike="noStrike" cap="none" dirty="0">
               <a:solidFill>
                 <a:srgbClr val="17365D"/>
-              </a:solidFill>
-              <a:latin typeface="Cambria" panose="02040503050406030204" pitchFamily="18" charset="0"/>
-              <a:ea typeface="Cambria" panose="02040503050406030204" pitchFamily="18" charset="0"/>
-              <a:cs typeface="Verdana"/>
-              <a:sym typeface="Verdana"/>
-            </a:endParaRPr>
-          </a:p>
-        </p:txBody>
-      </p:sp>
-      <p:sp>
-        <p:nvSpPr>
-          <p:cNvPr id="8" name="Google Shape;91;p13"/>
-          <p:cNvSpPr txBox="1"/>
-          <p:nvPr/>
-        </p:nvSpPr>
-        <p:spPr>
-          <a:xfrm>
-            <a:off x="156411" y="4130278"/>
-            <a:ext cx="12249915" cy="1562100"/>
-          </a:xfrm>
-          <a:prstGeom prst="rect">
-            <a:avLst/>
-          </a:prstGeom>
-          <a:noFill/>
-          <a:ln>
-            <a:noFill/>
-          </a:ln>
-        </p:spPr>
-        <p:txBody>
-          <a:bodyPr spcFirstLastPara="1" wrap="square" lIns="91425" tIns="45700" rIns="91425" bIns="45700" anchor="t" anchorCtr="0">
-            <a:noAutofit/>
-          </a:bodyPr>
-          <a:lstStyle/>
-          <a:p>
-            <a:pPr marL="0" marR="0" lvl="0" indent="0" rtl="0">
-              <a:spcBef>
-                <a:spcPts val="0"/>
-              </a:spcBef>
-              <a:spcAft>
-                <a:spcPts val="0"/>
-              </a:spcAft>
-              <a:buClr>
-                <a:srgbClr val="17365D"/>
-              </a:buClr>
-              <a:buSzPct val="100000"/>
-              <a:buFont typeface="Arial"/>
-              <a:buNone/>
-            </a:pPr>
-            <a:r>
-              <a:rPr lang="en-US" sz="2000" b="1" i="0" u="none" strike="noStrike" cap="none" dirty="0" smtClean="0">
-                <a:solidFill>
-                  <a:schemeClr val="accent1"/>
-                </a:solidFill>
-                <a:latin typeface="Cambria" panose="02040503050406030204" pitchFamily="18" charset="0"/>
-                <a:ea typeface="Cambria" panose="02040503050406030204" pitchFamily="18" charset="0"/>
-                <a:cs typeface="Verdana"/>
-                <a:sym typeface="Verdana"/>
-              </a:rPr>
-              <a:t>Name of the Program: B.Tech - CBD</a:t>
-            </a:r>
-          </a:p>
-          <a:p>
-            <a:pPr marL="0" marR="0" lvl="0" indent="0" rtl="0">
-              <a:spcBef>
-                <a:spcPts val="0"/>
-              </a:spcBef>
-              <a:spcAft>
-                <a:spcPts val="0"/>
-              </a:spcAft>
-              <a:buClr>
-                <a:srgbClr val="17365D"/>
-              </a:buClr>
-              <a:buSzPct val="100000"/>
-              <a:buFont typeface="Arial"/>
-              <a:buNone/>
-            </a:pPr>
-            <a:r>
-              <a:rPr lang="en-US" sz="2000" b="1" dirty="0" smtClean="0">
-                <a:solidFill>
-                  <a:schemeClr val="accent1"/>
-                </a:solidFill>
-                <a:latin typeface="Cambria" panose="02040503050406030204" pitchFamily="18" charset="0"/>
-                <a:ea typeface="Cambria" panose="02040503050406030204" pitchFamily="18" charset="0"/>
-                <a:cs typeface="Verdana"/>
-                <a:sym typeface="Verdana"/>
-              </a:rPr>
-              <a:t>Name of the HoD: Dr. Pravinth Raja</a:t>
-            </a:r>
-          </a:p>
-          <a:p>
-            <a:pPr marL="0" marR="0" lvl="0" indent="0" rtl="0">
-              <a:spcBef>
-                <a:spcPts val="0"/>
-              </a:spcBef>
-              <a:spcAft>
-                <a:spcPts val="0"/>
-              </a:spcAft>
-              <a:buClr>
-                <a:srgbClr val="17365D"/>
-              </a:buClr>
-              <a:buSzPct val="100000"/>
-              <a:buFont typeface="Arial"/>
-              <a:buNone/>
-            </a:pPr>
-            <a:r>
-              <a:rPr lang="en-US" sz="2000" b="1" i="0" u="none" strike="noStrike" cap="none" dirty="0" smtClean="0">
-                <a:solidFill>
-                  <a:schemeClr val="accent1"/>
-                </a:solidFill>
-                <a:latin typeface="Cambria" panose="02040503050406030204" pitchFamily="18" charset="0"/>
-                <a:ea typeface="Cambria" panose="02040503050406030204" pitchFamily="18" charset="0"/>
-                <a:cs typeface="Verdana"/>
-                <a:sym typeface="Verdana"/>
-              </a:rPr>
-              <a:t>Name of the Program Internship Coordinator: Ms. Nisha Robin Rohit</a:t>
-            </a:r>
-          </a:p>
-          <a:p>
-            <a:pPr lvl="0">
-              <a:buClr>
-                <a:srgbClr val="17365D"/>
-              </a:buClr>
-              <a:buSzPct val="100000"/>
-            </a:pPr>
-            <a:r>
-              <a:rPr lang="en-US" sz="2000" b="1" dirty="0">
-                <a:solidFill>
-                  <a:schemeClr val="accent1"/>
-                </a:solidFill>
-                <a:latin typeface="Cambria" panose="02040503050406030204" pitchFamily="18" charset="0"/>
-                <a:ea typeface="Cambria" panose="02040503050406030204" pitchFamily="18" charset="0"/>
-                <a:cs typeface="Verdana"/>
-                <a:sym typeface="Verdana"/>
-              </a:rPr>
-              <a:t>Name of the </a:t>
-            </a:r>
-            <a:r>
-              <a:rPr lang="en-US" sz="2000" b="1" dirty="0" smtClean="0">
-                <a:solidFill>
-                  <a:schemeClr val="accent1"/>
-                </a:solidFill>
-                <a:latin typeface="Cambria" panose="02040503050406030204" pitchFamily="18" charset="0"/>
-                <a:ea typeface="Cambria" panose="02040503050406030204" pitchFamily="18" charset="0"/>
-                <a:cs typeface="Verdana"/>
-                <a:sym typeface="Verdana"/>
-              </a:rPr>
-              <a:t>School Internship Coordinator: </a:t>
-            </a:r>
-            <a:r>
-              <a:rPr lang="en-US" sz="2000" b="1" dirty="0">
-                <a:latin typeface="Cambria" panose="02040503050406030204" pitchFamily="18" charset="0"/>
-                <a:ea typeface="Cambria" panose="02040503050406030204" pitchFamily="18" charset="0"/>
-                <a:cs typeface="Verdana"/>
-                <a:sym typeface="Verdana"/>
-              </a:rPr>
-              <a:t>D</a:t>
-            </a:r>
-            <a:r>
-              <a:rPr lang="en-US" sz="2000" b="1" dirty="0" smtClean="0">
-                <a:latin typeface="Cambria" panose="02040503050406030204" pitchFamily="18" charset="0"/>
-                <a:ea typeface="Cambria" panose="02040503050406030204" pitchFamily="18" charset="0"/>
-                <a:cs typeface="Verdana"/>
-                <a:sym typeface="Verdana"/>
-              </a:rPr>
-              <a:t>r</a:t>
-            </a:r>
-            <a:r>
-              <a:rPr lang="en-US" sz="2000" b="1" dirty="0">
-                <a:latin typeface="Cambria" panose="02040503050406030204" pitchFamily="18" charset="0"/>
-                <a:ea typeface="Cambria" panose="02040503050406030204" pitchFamily="18" charset="0"/>
-                <a:cs typeface="Verdana"/>
-                <a:sym typeface="Verdana"/>
-              </a:rPr>
-              <a:t>. Md Ziaur </a:t>
-            </a:r>
-            <a:r>
-              <a:rPr lang="en-US" sz="2000" b="1" dirty="0" smtClean="0">
-                <a:latin typeface="Cambria" panose="02040503050406030204" pitchFamily="18" charset="0"/>
-                <a:ea typeface="Cambria" panose="02040503050406030204" pitchFamily="18" charset="0"/>
-                <a:cs typeface="Verdana"/>
-                <a:sym typeface="Verdana"/>
-              </a:rPr>
-              <a:t>Rahman</a:t>
-            </a:r>
-          </a:p>
-          <a:p>
-            <a:pPr lvl="0">
-              <a:buClr>
-                <a:srgbClr val="17365D"/>
-              </a:buClr>
-              <a:buSzPct val="100000"/>
-            </a:pPr>
-            <a:r>
-              <a:rPr lang="en-US" sz="2000" b="1" dirty="0">
-                <a:latin typeface="Cambria" panose="02040503050406030204" pitchFamily="18" charset="0"/>
-                <a:ea typeface="Cambria" panose="02040503050406030204" pitchFamily="18" charset="0"/>
-                <a:cs typeface="Verdana"/>
-                <a:sym typeface="Verdana"/>
-              </a:rPr>
-              <a:t> </a:t>
-            </a:r>
-            <a:r>
-              <a:rPr lang="en-US" sz="2000" b="1" dirty="0" smtClean="0">
-                <a:latin typeface="Cambria" panose="02040503050406030204" pitchFamily="18" charset="0"/>
-                <a:ea typeface="Cambria" panose="02040503050406030204" pitchFamily="18" charset="0"/>
-                <a:cs typeface="Verdana"/>
-                <a:sym typeface="Verdana"/>
-              </a:rPr>
-              <a:t>													</a:t>
-            </a:r>
-            <a:endParaRPr sz="2000" b="1" i="0" u="none" strike="noStrike" cap="none" dirty="0">
-              <a:solidFill>
-                <a:schemeClr val="tx1"/>
               </a:solidFill>
               <a:latin typeface="Cambria" panose="02040503050406030204" pitchFamily="18" charset="0"/>
               <a:ea typeface="Cambria" panose="02040503050406030204" pitchFamily="18" charset="0"/>
@@ -10199,7 +9974,7 @@
                 <a:ea typeface="Tahoma" pitchFamily="34" charset="0"/>
                 <a:cs typeface="Times New Roman" panose="02020603050405020304" pitchFamily="18" charset="0"/>
               </a:rPr>
-              <a:t>Audit &amp; Assurance in ITDA</a:t>
+              <a:t>ITDA Audit</a:t>
             </a:r>
             <a:br>
               <a:rPr lang="en-US" sz="2400" dirty="0" smtClean="0">
@@ -10242,14 +10017,14 @@
                 <a:gridCol w="1371270">
                   <a:extLst>
                     <a:ext uri="{9D8B030D-6E8A-4147-A177-3AD203B41FA5}">
-                      <a16:colId xmlns="" xmlns:a16="http://schemas.microsoft.com/office/drawing/2014/main" val="2689928737"/>
+                      <a16:colId xmlns:a16="http://schemas.microsoft.com/office/drawing/2014/main" xmlns="" val="2689928737"/>
                     </a:ext>
                   </a:extLst>
                 </a:gridCol>
                 <a:gridCol w="3950282">
                   <a:extLst>
                     <a:ext uri="{9D8B030D-6E8A-4147-A177-3AD203B41FA5}">
-                      <a16:colId xmlns="" xmlns:a16="http://schemas.microsoft.com/office/drawing/2014/main" val="3965538731"/>
+                      <a16:colId xmlns:a16="http://schemas.microsoft.com/office/drawing/2014/main" xmlns="" val="3965538731"/>
                     </a:ext>
                   </a:extLst>
                 </a:gridCol>
@@ -10294,7 +10069,7 @@
                 </a:tc>
                 <a:extLst>
                   <a:ext uri="{0D108BD9-81ED-4DB2-BD59-A6C34878D82A}">
-                    <a16:rowId xmlns="" xmlns:a16="http://schemas.microsoft.com/office/drawing/2014/main" val="2965105319"/>
+                    <a16:rowId xmlns:a16="http://schemas.microsoft.com/office/drawing/2014/main" xmlns="" val="2965105319"/>
                   </a:ext>
                 </a:extLst>
               </a:tr>
@@ -10334,7 +10109,15 @@
                           <a:ea typeface="Cambria" panose="02040503050406030204" pitchFamily="18" charset="0"/>
                           <a:cs typeface="Times New Roman" panose="02020603050405020304" pitchFamily="18" charset="0"/>
                         </a:rPr>
-                        <a:t>Tanushree R</a:t>
+                        <a:t>TANUSHREE</a:t>
+                      </a:r>
+                      <a:r>
+                        <a:rPr lang="en-US" baseline="0" dirty="0" smtClean="0">
+                          <a:latin typeface="Cambria" panose="02040503050406030204" pitchFamily="18" charset="0"/>
+                          <a:ea typeface="Cambria" panose="02040503050406030204" pitchFamily="18" charset="0"/>
+                          <a:cs typeface="Times New Roman" panose="02020603050405020304" pitchFamily="18" charset="0"/>
+                        </a:rPr>
+                        <a:t> R</a:t>
                       </a:r>
                       <a:endParaRPr lang="en-US" dirty="0">
                         <a:latin typeface="Cambria" panose="02040503050406030204" pitchFamily="18" charset="0"/>
@@ -10347,7 +10130,7 @@
                 </a:tc>
                 <a:extLst>
                   <a:ext uri="{0D108BD9-81ED-4DB2-BD59-A6C34878D82A}">
-                    <a16:rowId xmlns="" xmlns:a16="http://schemas.microsoft.com/office/drawing/2014/main" val="673540802"/>
+                    <a16:rowId xmlns:a16="http://schemas.microsoft.com/office/drawing/2014/main" xmlns="" val="673540802"/>
                   </a:ext>
                 </a:extLst>
               </a:tr>
@@ -10400,7 +10183,7 @@
                 </a:tc>
                 <a:extLst>
                   <a:ext uri="{0D108BD9-81ED-4DB2-BD59-A6C34878D82A}">
-                    <a16:rowId xmlns="" xmlns:a16="http://schemas.microsoft.com/office/drawing/2014/main" val="1825509489"/>
+                    <a16:rowId xmlns:a16="http://schemas.microsoft.com/office/drawing/2014/main" xmlns="" val="1825509489"/>
                   </a:ext>
                 </a:extLst>
               </a:tr>
@@ -10453,7 +10236,7 @@
                 </a:tc>
                 <a:extLst>
                   <a:ext uri="{0D108BD9-81ED-4DB2-BD59-A6C34878D82A}">
-                    <a16:rowId xmlns="" xmlns:a16="http://schemas.microsoft.com/office/drawing/2014/main" val="1278268189"/>
+                    <a16:rowId xmlns:a16="http://schemas.microsoft.com/office/drawing/2014/main" xmlns="" val="1278268189"/>
                   </a:ext>
                 </a:extLst>
               </a:tr>
@@ -10461,10 +10244,241 @@
           </a:graphicData>
         </a:graphic>
       </p:graphicFrame>
+      <p:sp>
+        <p:nvSpPr>
+          <p:cNvPr id="7" name="Google Shape;91;p13"/>
+          <p:cNvSpPr txBox="1"/>
+          <p:nvPr/>
+        </p:nvSpPr>
+        <p:spPr>
+          <a:xfrm>
+            <a:off x="156411" y="4130278"/>
+            <a:ext cx="12249915" cy="1562100"/>
+          </a:xfrm>
+          <a:prstGeom prst="rect">
+            <a:avLst/>
+          </a:prstGeom>
+          <a:noFill/>
+          <a:ln>
+            <a:noFill/>
+          </a:ln>
+        </p:spPr>
+        <p:txBody>
+          <a:bodyPr spcFirstLastPara="1" wrap="square" lIns="91425" tIns="45700" rIns="91425" bIns="45700" anchor="t" anchorCtr="0">
+            <a:noAutofit/>
+          </a:bodyPr>
+          <a:lstStyle/>
+          <a:p>
+            <a:pPr marL="0" marR="0" lvl="0" indent="0" rtl="0">
+              <a:spcBef>
+                <a:spcPts val="0"/>
+              </a:spcBef>
+              <a:spcAft>
+                <a:spcPts val="0"/>
+              </a:spcAft>
+              <a:buClr>
+                <a:srgbClr val="17365D"/>
+              </a:buClr>
+              <a:buSzPct val="100000"/>
+              <a:buFont typeface="Arial"/>
+              <a:buNone/>
+            </a:pPr>
+            <a:r>
+              <a:rPr lang="en-US" sz="2000" b="1" i="0" u="none" strike="noStrike" cap="none" dirty="0" smtClean="0">
+                <a:solidFill>
+                  <a:schemeClr val="accent1"/>
+                </a:solidFill>
+                <a:latin typeface="Cambria" panose="02040503050406030204" pitchFamily="18" charset="0"/>
+                <a:ea typeface="Cambria" panose="02040503050406030204" pitchFamily="18" charset="0"/>
+                <a:cs typeface="Verdana"/>
+                <a:sym typeface="Verdana"/>
+              </a:rPr>
+              <a:t>Name of the Program: </a:t>
+            </a:r>
+            <a:r>
+              <a:rPr lang="en-US" sz="2000" b="1" i="0" u="none" strike="noStrike" cap="none" dirty="0" smtClean="0">
+                <a:latin typeface="Cambria" panose="02040503050406030204" pitchFamily="18" charset="0"/>
+                <a:ea typeface="Cambria" panose="02040503050406030204" pitchFamily="18" charset="0"/>
+                <a:cs typeface="Verdana"/>
+                <a:sym typeface="Verdana"/>
+              </a:rPr>
+              <a:t>B.Tech</a:t>
+            </a:r>
+            <a:endParaRPr lang="en-US" sz="2000" b="1" i="0" u="none" strike="noStrike" cap="none" dirty="0" smtClean="0">
+              <a:latin typeface="Cambria" panose="02040503050406030204" pitchFamily="18" charset="0"/>
+              <a:ea typeface="Cambria" panose="02040503050406030204" pitchFamily="18" charset="0"/>
+              <a:cs typeface="Verdana"/>
+              <a:sym typeface="Verdana"/>
+            </a:endParaRPr>
+          </a:p>
+          <a:p>
+            <a:pPr lvl="0">
+              <a:buClr>
+                <a:srgbClr val="17365D"/>
+              </a:buClr>
+              <a:buSzPct val="100000"/>
+            </a:pPr>
+            <a:r>
+              <a:rPr lang="en-US" sz="2000" b="1" dirty="0" smtClean="0">
+                <a:solidFill>
+                  <a:schemeClr val="accent1"/>
+                </a:solidFill>
+                <a:latin typeface="Cambria" panose="02040503050406030204" pitchFamily="18" charset="0"/>
+                <a:ea typeface="Cambria" panose="02040503050406030204" pitchFamily="18" charset="0"/>
+                <a:cs typeface="Verdana"/>
+                <a:sym typeface="Verdana"/>
+              </a:rPr>
+              <a:t>Name of the HoD: </a:t>
+            </a:r>
+            <a:r>
+              <a:rPr lang="en-US" sz="2000" b="1" dirty="0" smtClean="0">
+                <a:latin typeface="Cambria" pitchFamily="18" charset="0"/>
+                <a:ea typeface="Cambria" pitchFamily="18" charset="0"/>
+                <a:cs typeface="Times New Roman" pitchFamily="18" charset="0"/>
+              </a:rPr>
+              <a:t>Dr. S. </a:t>
+            </a:r>
+            <a:r>
+              <a:rPr lang="en-US" sz="2000" b="1" dirty="0" smtClean="0">
+                <a:latin typeface="Cambria" pitchFamily="18" charset="0"/>
+                <a:ea typeface="Cambria" pitchFamily="18" charset="0"/>
+                <a:cs typeface="Times New Roman" pitchFamily="18" charset="0"/>
+              </a:rPr>
+              <a:t>Pravinthraja</a:t>
+            </a:r>
+            <a:endParaRPr lang="en-US" sz="2000" b="1" dirty="0" smtClean="0">
+              <a:solidFill>
+                <a:schemeClr val="accent1"/>
+              </a:solidFill>
+              <a:latin typeface="Cambria" pitchFamily="18" charset="0"/>
+              <a:ea typeface="Cambria" pitchFamily="18" charset="0"/>
+              <a:cs typeface="Times New Roman" pitchFamily="18" charset="0"/>
+              <a:sym typeface="Verdana"/>
+            </a:endParaRPr>
+          </a:p>
+          <a:p>
+            <a:pPr lvl="0">
+              <a:buClr>
+                <a:srgbClr val="17365D"/>
+              </a:buClr>
+              <a:buSzPct val="100000"/>
+            </a:pPr>
+            <a:r>
+              <a:rPr lang="en-US" sz="2000" b="1" i="0" u="none" strike="noStrike" cap="none" dirty="0" smtClean="0">
+                <a:solidFill>
+                  <a:schemeClr val="accent1"/>
+                </a:solidFill>
+                <a:latin typeface="Cambria" panose="02040503050406030204" pitchFamily="18" charset="0"/>
+                <a:ea typeface="Cambria" panose="02040503050406030204" pitchFamily="18" charset="0"/>
+                <a:cs typeface="Verdana"/>
+                <a:sym typeface="Verdana"/>
+              </a:rPr>
+              <a:t>Name of the Program Internship Coordinator: </a:t>
+            </a:r>
+            <a:r>
+              <a:rPr lang="en-US" sz="2000" b="1" dirty="0" smtClean="0">
+                <a:latin typeface="Cambria" pitchFamily="18" charset="0"/>
+                <a:ea typeface="Cambria" pitchFamily="18" charset="0"/>
+                <a:cs typeface="Times New Roman" pitchFamily="18" charset="0"/>
+              </a:rPr>
+              <a:t>Mrs. Nisha Robin Rohit </a:t>
+            </a:r>
+            <a:endParaRPr lang="en-US" sz="2000" b="1" i="0" u="none" strike="noStrike" cap="none" dirty="0" smtClean="0">
+              <a:solidFill>
+                <a:schemeClr val="accent1"/>
+              </a:solidFill>
+              <a:latin typeface="Cambria" pitchFamily="18" charset="0"/>
+              <a:ea typeface="Cambria" pitchFamily="18" charset="0"/>
+              <a:cs typeface="Times New Roman" pitchFamily="18" charset="0"/>
+              <a:sym typeface="Verdana"/>
+            </a:endParaRPr>
+          </a:p>
+          <a:p>
+            <a:pPr lvl="0">
+              <a:buClr>
+                <a:srgbClr val="17365D"/>
+              </a:buClr>
+              <a:buSzPct val="100000"/>
+            </a:pPr>
+            <a:r>
+              <a:rPr lang="en-US" sz="2000" b="1" dirty="0">
+                <a:solidFill>
+                  <a:schemeClr val="accent1"/>
+                </a:solidFill>
+                <a:latin typeface="Cambria" panose="02040503050406030204" pitchFamily="18" charset="0"/>
+                <a:ea typeface="Cambria" panose="02040503050406030204" pitchFamily="18" charset="0"/>
+                <a:cs typeface="Verdana"/>
+                <a:sym typeface="Verdana"/>
+              </a:rPr>
+              <a:t>Name of the </a:t>
+            </a:r>
+            <a:r>
+              <a:rPr lang="en-US" sz="2000" b="1" dirty="0" smtClean="0">
+                <a:solidFill>
+                  <a:schemeClr val="accent1"/>
+                </a:solidFill>
+                <a:latin typeface="Cambria" panose="02040503050406030204" pitchFamily="18" charset="0"/>
+                <a:ea typeface="Cambria" panose="02040503050406030204" pitchFamily="18" charset="0"/>
+                <a:cs typeface="Verdana"/>
+                <a:sym typeface="Verdana"/>
+              </a:rPr>
+              <a:t>School Internship Coordinator: </a:t>
+            </a:r>
+            <a:r>
+              <a:rPr lang="en-US" sz="2000" b="1" dirty="0" smtClean="0">
+                <a:latin typeface="Cambria" pitchFamily="18" charset="0"/>
+                <a:ea typeface="Cambria" pitchFamily="18" charset="0"/>
+              </a:rPr>
+              <a:t>Dr. Geetha A </a:t>
+            </a:r>
+            <a:endParaRPr lang="en-US" sz="2000" b="1" dirty="0" smtClean="0">
+              <a:latin typeface="Cambria" pitchFamily="18" charset="0"/>
+              <a:ea typeface="Cambria" pitchFamily="18" charset="0"/>
+              <a:cs typeface="Verdana"/>
+              <a:sym typeface="Verdana"/>
+            </a:endParaRPr>
+          </a:p>
+          <a:p>
+            <a:pPr lvl="0">
+              <a:buClr>
+                <a:srgbClr val="17365D"/>
+              </a:buClr>
+              <a:buSzPct val="100000"/>
+            </a:pPr>
+            <a:r>
+              <a:rPr lang="en-US" sz="2000" b="1" dirty="0">
+                <a:latin typeface="Cambria" panose="02040503050406030204" pitchFamily="18" charset="0"/>
+                <a:ea typeface="Cambria" panose="02040503050406030204" pitchFamily="18" charset="0"/>
+                <a:cs typeface="Verdana"/>
+                <a:sym typeface="Verdana"/>
+              </a:rPr>
+              <a:t> </a:t>
+            </a:r>
+            <a:r>
+              <a:rPr lang="en-US" sz="2000" b="1" dirty="0" smtClean="0">
+                <a:latin typeface="Cambria" panose="02040503050406030204" pitchFamily="18" charset="0"/>
+                <a:ea typeface="Cambria" panose="02040503050406030204" pitchFamily="18" charset="0"/>
+                <a:cs typeface="Verdana"/>
+                <a:sym typeface="Verdana"/>
+              </a:rPr>
+              <a:t>													</a:t>
+            </a:r>
+            <a:endParaRPr sz="2000" b="1" i="0" u="none" strike="noStrike" cap="none" dirty="0">
+              <a:solidFill>
+                <a:schemeClr val="tx1"/>
+              </a:solidFill>
+              <a:latin typeface="Cambria" panose="02040503050406030204" pitchFamily="18" charset="0"/>
+              <a:ea typeface="Cambria" panose="02040503050406030204" pitchFamily="18" charset="0"/>
+              <a:cs typeface="Verdana"/>
+              <a:sym typeface="Verdana"/>
+            </a:endParaRPr>
+          </a:p>
+        </p:txBody>
+      </p:sp>
     </p:spTree>
     <p:extLst>
       <p:ext uri="{BB962C8B-B14F-4D97-AF65-F5344CB8AC3E}">
-        <p14:creationId xmlns:p14="http://schemas.microsoft.com/office/powerpoint/2010/main" xmlns="" val="3066724582"/>
+        <p14:creationId xmlns="" xmlns:p14="http://schemas.microsoft.com/office/powerpoint/2010/main" val="3066724582"/>
       </p:ext>
     </p:extLst>
   </p:cSld>
@@ -10472,7 +10486,7 @@
     <a:masterClrMapping/>
   </p:clrMapOvr>
   <mc:AlternateContent xmlns:mc="http://schemas.openxmlformats.org/markup-compatibility/2006">
-    <mc:Choice xmlns:p14="http://schemas.microsoft.com/office/powerpoint/2010/main" xmlns="" Requires="p14">
+    <mc:Choice xmlns="" xmlns:p14="http://schemas.microsoft.com/office/powerpoint/2010/main" Requires="p14">
       <p:transition spd="slow" p14:dur="2000"/>
     </mc:Choice>
     <mc:Fallback>
@@ -10634,7 +10648,7 @@
           <a:blip r:embed="rId2" cstate="print">
             <a:extLst>
               <a:ext uri="{28A0092B-C50C-407E-A947-70E740481C1C}">
-                <a14:useLocalDpi xmlns:a14="http://schemas.microsoft.com/office/drawing/2010/main" xmlns="" val="0"/>
+                <a14:useLocalDpi xmlns="" xmlns:a14="http://schemas.microsoft.com/office/drawing/2010/main" val="0"/>
               </a:ext>
             </a:extLst>
           </a:blip>
@@ -10657,14 +10671,14 @@
           </a:ln>
           <a:extLst>
             <a:ext uri="{909E8E84-426E-40DD-AFC4-6F175D3DCCD1}">
-              <a14:hiddenFill xmlns:a14="http://schemas.microsoft.com/office/drawing/2010/main" xmlns="">
+              <a14:hiddenFill xmlns="" xmlns:a14="http://schemas.microsoft.com/office/drawing/2010/main">
                 <a:solidFill>
                   <a:srgbClr val="FFFFFF"/>
                 </a:solidFill>
               </a14:hiddenFill>
             </a:ext>
             <a:ext uri="{91240B29-F687-4F45-9708-019B960494DF}">
-              <a14:hiddenLine xmlns:a14="http://schemas.microsoft.com/office/drawing/2010/main" xmlns="" w="9525">
+              <a14:hiddenLine xmlns="" xmlns:a14="http://schemas.microsoft.com/office/drawing/2010/main" w="9525">
                 <a:solidFill>
                   <a:srgbClr val="000000"/>
                 </a:solidFill>
@@ -10679,7 +10693,7 @@
     </p:spTree>
     <p:extLst>
       <p:ext uri="{BB962C8B-B14F-4D97-AF65-F5344CB8AC3E}">
-        <p14:creationId xmlns:p14="http://schemas.microsoft.com/office/powerpoint/2010/main" xmlns="" val="97546580"/>
+        <p14:creationId xmlns="" xmlns:p14="http://schemas.microsoft.com/office/powerpoint/2010/main" val="97546580"/>
       </p:ext>
     </p:extLst>
   </p:cSld>
@@ -10687,7 +10701,7 @@
     <a:masterClrMapping/>
   </p:clrMapOvr>
   <mc:AlternateContent xmlns:mc="http://schemas.openxmlformats.org/markup-compatibility/2006">
-    <mc:Choice xmlns:p14="http://schemas.microsoft.com/office/powerpoint/2010/main" xmlns="" Requires="p14">
+    <mc:Choice xmlns="" xmlns:p14="http://schemas.microsoft.com/office/powerpoint/2010/main" Requires="p14">
       <p:transition spd="slow" p14:dur="2000"/>
     </mc:Choice>
     <mc:Fallback>
@@ -10789,7 +10803,7 @@
     </p:spTree>
     <p:extLst>
       <p:ext uri="{BB962C8B-B14F-4D97-AF65-F5344CB8AC3E}">
-        <p14:creationId xmlns:p14="http://schemas.microsoft.com/office/powerpoint/2010/main" xmlns="" val="696605960"/>
+        <p14:creationId xmlns="" xmlns:p14="http://schemas.microsoft.com/office/powerpoint/2010/main" val="696605960"/>
       </p:ext>
     </p:extLst>
   </p:cSld>
@@ -10797,7 +10811,7 @@
     <a:masterClrMapping/>
   </p:clrMapOvr>
   <mc:AlternateContent xmlns:mc="http://schemas.openxmlformats.org/markup-compatibility/2006">
-    <mc:Choice xmlns:p14="http://schemas.microsoft.com/office/powerpoint/2010/main" xmlns="" Requires="p14">
+    <mc:Choice xmlns="" xmlns:p14="http://schemas.microsoft.com/office/powerpoint/2010/main" Requires="p14">
       <p:transition spd="slow" p14:dur="2000"/>
     </mc:Choice>
     <mc:Fallback>
@@ -11141,7 +11155,7 @@
     </p:spTree>
     <p:extLst>
       <p:ext uri="{BB962C8B-B14F-4D97-AF65-F5344CB8AC3E}">
-        <p14:creationId xmlns:p14="http://schemas.microsoft.com/office/powerpoint/2010/main" xmlns="" val="516993045"/>
+        <p14:creationId xmlns="" xmlns:p14="http://schemas.microsoft.com/office/powerpoint/2010/main" val="516993045"/>
       </p:ext>
     </p:extLst>
   </p:cSld>
@@ -11149,7 +11163,7 @@
     <a:masterClrMapping/>
   </p:clrMapOvr>
   <mc:AlternateContent xmlns:mc="http://schemas.openxmlformats.org/markup-compatibility/2006">
-    <mc:Choice xmlns:p14="http://schemas.microsoft.com/office/powerpoint/2010/main" xmlns="" Requires="p14">
+    <mc:Choice xmlns="" xmlns:p14="http://schemas.microsoft.com/office/powerpoint/2010/main" Requires="p14">
       <p:transition spd="slow" p14:dur="2000"/>
     </mc:Choice>
     <mc:Fallback>
@@ -11322,7 +11336,7 @@
     </p:spTree>
     <p:extLst>
       <p:ext uri="{BB962C8B-B14F-4D97-AF65-F5344CB8AC3E}">
-        <p14:creationId xmlns:p14="http://schemas.microsoft.com/office/powerpoint/2010/main" xmlns="" val="1558138914"/>
+        <p14:creationId xmlns="" xmlns:p14="http://schemas.microsoft.com/office/powerpoint/2010/main" val="1558138914"/>
       </p:ext>
     </p:extLst>
   </p:cSld>
@@ -11330,7 +11344,7 @@
     <a:masterClrMapping/>
   </p:clrMapOvr>
   <mc:AlternateContent xmlns:mc="http://schemas.openxmlformats.org/markup-compatibility/2006">
-    <mc:Choice xmlns:p14="http://schemas.microsoft.com/office/powerpoint/2010/main" xmlns="" Requires="p14">
+    <mc:Choice xmlns="" xmlns:p14="http://schemas.microsoft.com/office/powerpoint/2010/main" Requires="p14">
       <p:transition spd="slow" p14:dur="2000"/>
     </mc:Choice>
     <mc:Fallback>
@@ -11495,7 +11509,7 @@
     </p:spTree>
     <p:extLst>
       <p:ext uri="{BB962C8B-B14F-4D97-AF65-F5344CB8AC3E}">
-        <p14:creationId xmlns:p14="http://schemas.microsoft.com/office/powerpoint/2010/main" xmlns="" val="658682123"/>
+        <p14:creationId xmlns="" xmlns:p14="http://schemas.microsoft.com/office/powerpoint/2010/main" val="658682123"/>
       </p:ext>
     </p:extLst>
   </p:cSld>
@@ -11503,7 +11517,7 @@
     <a:masterClrMapping/>
   </p:clrMapOvr>
   <mc:AlternateContent xmlns:mc="http://schemas.openxmlformats.org/markup-compatibility/2006">
-    <mc:Choice xmlns:p14="http://schemas.microsoft.com/office/powerpoint/2010/main" xmlns="" Requires="p14">
+    <mc:Choice xmlns="" xmlns:p14="http://schemas.microsoft.com/office/powerpoint/2010/main" Requires="p14">
       <p:transition spd="slow" p14:dur="2000"/>
     </mc:Choice>
     <mc:Fallback>
@@ -11596,11 +11610,18 @@
           <a:p>
             <a:pPr algn="just"/>
             <a:r>
+              <a:rPr lang="en-IN" smtClean="0">
+                <a:latin typeface="Times New Roman" panose="02020603050405020304" pitchFamily="18" charset="0"/>
+                <a:cs typeface="Times New Roman" panose="02020603050405020304" pitchFamily="18" charset="0"/>
+              </a:rPr>
+              <a:t>Our team </a:t>
+            </a:r>
+            <a:r>
               <a:rPr lang="en-IN" dirty="0" smtClean="0">
                 <a:latin typeface="Times New Roman" panose="02020603050405020304" pitchFamily="18" charset="0"/>
                 <a:cs typeface="Times New Roman" panose="02020603050405020304" pitchFamily="18" charset="0"/>
               </a:rPr>
-              <a:t>Our team consists of Trainers - Rohan Mehta, Soundaryasri K S</a:t>
+              <a:t>- Rohan Mehta, Soundaryasri K S</a:t>
             </a:r>
           </a:p>
           <a:p>
@@ -11610,7 +11631,7 @@
                 <a:latin typeface="Times New Roman" panose="02020603050405020304" pitchFamily="18" charset="0"/>
                 <a:cs typeface="Times New Roman" panose="02020603050405020304" pitchFamily="18" charset="0"/>
               </a:rPr>
-              <a:t>Reporting manager – Harshine K S</a:t>
+              <a:t>Reporting manager - Soundaryasri K S </a:t>
             </a:r>
           </a:p>
           <a:p>
@@ -11663,7 +11684,7 @@
     </p:spTree>
     <p:extLst>
       <p:ext uri="{BB962C8B-B14F-4D97-AF65-F5344CB8AC3E}">
-        <p14:creationId xmlns:p14="http://schemas.microsoft.com/office/powerpoint/2010/main" xmlns="" val="2510696604"/>
+        <p14:creationId xmlns="" xmlns:p14="http://schemas.microsoft.com/office/powerpoint/2010/main" val="2510696604"/>
       </p:ext>
     </p:extLst>
   </p:cSld>
@@ -11671,7 +11692,7 @@
     <a:masterClrMapping/>
   </p:clrMapOvr>
   <mc:AlternateContent xmlns:mc="http://schemas.openxmlformats.org/markup-compatibility/2006">
-    <mc:Choice xmlns:p14="http://schemas.microsoft.com/office/powerpoint/2010/main" xmlns="" Requires="p14">
+    <mc:Choice xmlns="" xmlns:p14="http://schemas.microsoft.com/office/powerpoint/2010/main" Requires="p14">
       <p:transition spd="slow" p14:dur="2000"/>
     </mc:Choice>
     <mc:Fallback>
@@ -11825,7 +11846,7 @@
     </p:spTree>
     <p:extLst>
       <p:ext uri="{BB962C8B-B14F-4D97-AF65-F5344CB8AC3E}">
-        <p14:creationId xmlns:p14="http://schemas.microsoft.com/office/powerpoint/2010/main" xmlns="" val="1206156993"/>
+        <p14:creationId xmlns="" xmlns:p14="http://schemas.microsoft.com/office/powerpoint/2010/main" val="1206156993"/>
       </p:ext>
     </p:extLst>
   </p:cSld>
@@ -11833,7 +11854,7 @@
     <a:masterClrMapping/>
   </p:clrMapOvr>
   <mc:AlternateContent xmlns:mc="http://schemas.openxmlformats.org/markup-compatibility/2006">
-    <mc:Choice xmlns:p14="http://schemas.microsoft.com/office/powerpoint/2010/main" xmlns="" Requires="p14">
+    <mc:Choice xmlns="" xmlns:p14="http://schemas.microsoft.com/office/powerpoint/2010/main" Requires="p14">
       <p:transition spd="slow" p14:dur="2000"/>
     </mc:Choice>
     <mc:Fallback>
@@ -11990,7 +12011,7 @@
     </p:spTree>
     <p:extLst>
       <p:ext uri="{BB962C8B-B14F-4D97-AF65-F5344CB8AC3E}">
-        <p14:creationId xmlns:p14="http://schemas.microsoft.com/office/powerpoint/2010/main" xmlns="" val="2516334746"/>
+        <p14:creationId xmlns="" xmlns:p14="http://schemas.microsoft.com/office/powerpoint/2010/main" val="2516334746"/>
       </p:ext>
     </p:extLst>
   </p:cSld>
@@ -11998,7 +12019,7 @@
     <a:masterClrMapping/>
   </p:clrMapOvr>
   <mc:AlternateContent xmlns:mc="http://schemas.openxmlformats.org/markup-compatibility/2006">
-    <mc:Choice xmlns:p14="http://schemas.microsoft.com/office/powerpoint/2010/main" xmlns="" Requires="p14">
+    <mc:Choice xmlns="" xmlns:p14="http://schemas.microsoft.com/office/powerpoint/2010/main" Requires="p14">
       <p:transition spd="slow" p14:dur="2000"/>
     </mc:Choice>
     <mc:Fallback>
@@ -12156,7 +12177,7 @@
     </p:spTree>
     <p:extLst>
       <p:ext uri="{BB962C8B-B14F-4D97-AF65-F5344CB8AC3E}">
-        <p14:creationId xmlns:p14="http://schemas.microsoft.com/office/powerpoint/2010/main" xmlns="" val="3497100239"/>
+        <p14:creationId xmlns="" xmlns:p14="http://schemas.microsoft.com/office/powerpoint/2010/main" val="3497100239"/>
       </p:ext>
     </p:extLst>
   </p:cSld>
@@ -12164,7 +12185,7 @@
     <a:masterClrMapping/>
   </p:clrMapOvr>
   <mc:AlternateContent xmlns:mc="http://schemas.openxmlformats.org/markup-compatibility/2006">
-    <mc:Choice xmlns:p14="http://schemas.microsoft.com/office/powerpoint/2010/main" xmlns="" Requires="p14">
+    <mc:Choice xmlns="" xmlns:p14="http://schemas.microsoft.com/office/powerpoint/2010/main" Requires="p14">
       <p:transition spd="slow" p14:dur="2000"/>
     </mc:Choice>
     <mc:Fallback>
@@ -12296,7 +12317,7 @@
     </p:spTree>
     <p:extLst>
       <p:ext uri="{BB962C8B-B14F-4D97-AF65-F5344CB8AC3E}">
-        <p14:creationId xmlns:p14="http://schemas.microsoft.com/office/powerpoint/2010/main" xmlns="" val="295621377"/>
+        <p14:creationId xmlns="" xmlns:p14="http://schemas.microsoft.com/office/powerpoint/2010/main" val="295621377"/>
       </p:ext>
     </p:extLst>
   </p:cSld>
@@ -12304,7 +12325,7 @@
     <a:masterClrMapping/>
   </p:clrMapOvr>
   <mc:AlternateContent xmlns:mc="http://schemas.openxmlformats.org/markup-compatibility/2006">
-    <mc:Choice xmlns:p14="http://schemas.microsoft.com/office/powerpoint/2010/main" xmlns="" Requires="p14">
+    <mc:Choice xmlns="" xmlns:p14="http://schemas.microsoft.com/office/powerpoint/2010/main" Requires="p14">
       <p:transition spd="slow" p14:dur="2000"/>
     </mc:Choice>
     <mc:Fallback>
@@ -12603,7 +12624,7 @@
   <a:extraClrSchemeLst/>
   <a:extLst>
     <a:ext uri="{05A4C25C-085E-4340-85A3-A5531E510DB2}">
-      <thm15:themeFamily xmlns:thm15="http://schemas.microsoft.com/office/thememl/2012/main" xmlns="" name="Office Theme" id="{62F939B6-93AF-4DB8-9C6B-D6C7DFDC589F}" vid="{4A3C46E8-61CC-4603-A589-7422A47A8E4A}"/>
+      <thm15:themeFamily xmlns="" xmlns:thm15="http://schemas.microsoft.com/office/thememl/2012/main" name="Office Theme" id="{62F939B6-93AF-4DB8-9C6B-D6C7DFDC589F}" vid="{4A3C46E8-61CC-4603-A589-7422A47A8E4A}"/>
     </a:ext>
   </a:extLst>
 </a:theme>
@@ -12864,7 +12885,7 @@
   <a:extraClrSchemeLst/>
   <a:extLst>
     <a:ext uri="{05A4C25C-085E-4340-85A3-A5531E510DB2}">
-      <thm15:themeFamily xmlns:thm15="http://schemas.microsoft.com/office/thememl/2012/main" xmlns="" name="Office Theme" id="{62F939B6-93AF-4DB8-9C6B-D6C7DFDC589F}" vid="{4A3C46E8-61CC-4603-A589-7422A47A8E4A}"/>
+      <thm15:themeFamily xmlns="" xmlns:thm15="http://schemas.microsoft.com/office/thememl/2012/main" name="Office Theme" id="{62F939B6-93AF-4DB8-9C6B-D6C7DFDC589F}" vid="{4A3C46E8-61CC-4603-A589-7422A47A8E4A}"/>
     </a:ext>
   </a:extLst>
 </a:theme>
